--- a/electric.pptx
+++ b/electric.pptx
@@ -5,11 +5,13 @@
     <p:sldMasterId id="2147483648" r:id="rId1"/>
   </p:sldMasterIdLst>
   <p:notesMasterIdLst>
-    <p:notesMasterId r:id="rId4"/>
+    <p:notesMasterId r:id="rId6"/>
   </p:notesMasterIdLst>
   <p:sldIdLst>
     <p:sldId id="261" r:id="rId2"/>
     <p:sldId id="262" r:id="rId3"/>
+    <p:sldId id="260" r:id="rId4"/>
+    <p:sldId id="263" r:id="rId5"/>
   </p:sldIdLst>
   <p:sldSz cx="12192000" cy="6858000"/>
   <p:notesSz cx="6858000" cy="9144000"/>
@@ -198,7 +200,7 @@
           <a:p>
             <a:fld id="{D2843BDE-B8C0-934E-9704-CBA3B88C1FB8}" type="datetimeFigureOut">
               <a:rPr lang="en-US" smtClean="0"/>
-              <a:t>6/14/23</a:t>
+              <a:t>11/30/23</a:t>
             </a:fld>
             <a:endParaRPr lang="en-US"/>
           </a:p>
@@ -695,7 +697,7 @@
           <a:lstStyle/>
           <a:p>
             <a:fld id="{5F491023-0B0A-7041-9F06-D25A50EF063B}" type="datetimeFigureOut">
-              <a:t>6/14/23</a:t>
+              <a:t>11/30/23</a:t>
             </a:fld>
             <a:endParaRPr lang="en-US"/>
           </a:p>
@@ -891,7 +893,7 @@
           <a:lstStyle/>
           <a:p>
             <a:fld id="{5F491023-0B0A-7041-9F06-D25A50EF063B}" type="datetimeFigureOut">
-              <a:t>6/14/23</a:t>
+              <a:t>11/30/23</a:t>
             </a:fld>
             <a:endParaRPr lang="en-US"/>
           </a:p>
@@ -1097,7 +1099,7 @@
           <a:lstStyle/>
           <a:p>
             <a:fld id="{5F491023-0B0A-7041-9F06-D25A50EF063B}" type="datetimeFigureOut">
-              <a:t>6/14/23</a:t>
+              <a:t>11/30/23</a:t>
             </a:fld>
             <a:endParaRPr lang="en-US"/>
           </a:p>
@@ -1293,7 +1295,7 @@
           <a:lstStyle/>
           <a:p>
             <a:fld id="{5F491023-0B0A-7041-9F06-D25A50EF063B}" type="datetimeFigureOut">
-              <a:t>6/14/23</a:t>
+              <a:t>11/30/23</a:t>
             </a:fld>
             <a:endParaRPr lang="en-US"/>
           </a:p>
@@ -1566,7 +1568,7 @@
           <a:lstStyle/>
           <a:p>
             <a:fld id="{5F491023-0B0A-7041-9F06-D25A50EF063B}" type="datetimeFigureOut">
-              <a:t>6/14/23</a:t>
+              <a:t>11/30/23</a:t>
             </a:fld>
             <a:endParaRPr lang="en-US"/>
           </a:p>
@@ -1829,7 +1831,7 @@
           <a:lstStyle/>
           <a:p>
             <a:fld id="{5F491023-0B0A-7041-9F06-D25A50EF063B}" type="datetimeFigureOut">
-              <a:t>6/14/23</a:t>
+              <a:t>11/30/23</a:t>
             </a:fld>
             <a:endParaRPr lang="en-US"/>
           </a:p>
@@ -2239,7 +2241,7 @@
           <a:lstStyle/>
           <a:p>
             <a:fld id="{5F491023-0B0A-7041-9F06-D25A50EF063B}" type="datetimeFigureOut">
-              <a:t>6/14/23</a:t>
+              <a:t>11/30/23</a:t>
             </a:fld>
             <a:endParaRPr lang="en-US"/>
           </a:p>
@@ -2378,7 +2380,7 @@
           <a:lstStyle/>
           <a:p>
             <a:fld id="{5F491023-0B0A-7041-9F06-D25A50EF063B}" type="datetimeFigureOut">
-              <a:t>6/14/23</a:t>
+              <a:t>11/30/23</a:t>
             </a:fld>
             <a:endParaRPr lang="en-US"/>
           </a:p>
@@ -2489,7 +2491,7 @@
           <a:lstStyle/>
           <a:p>
             <a:fld id="{5F491023-0B0A-7041-9F06-D25A50EF063B}" type="datetimeFigureOut">
-              <a:t>6/14/23</a:t>
+              <a:t>11/30/23</a:t>
             </a:fld>
             <a:endParaRPr lang="en-US"/>
           </a:p>
@@ -2798,7 +2800,7 @@
           <a:lstStyle/>
           <a:p>
             <a:fld id="{5F491023-0B0A-7041-9F06-D25A50EF063B}" type="datetimeFigureOut">
-              <a:t>6/14/23</a:t>
+              <a:t>11/30/23</a:t>
             </a:fld>
             <a:endParaRPr lang="en-US"/>
           </a:p>
@@ -3084,7 +3086,7 @@
           <a:lstStyle/>
           <a:p>
             <a:fld id="{5F491023-0B0A-7041-9F06-D25A50EF063B}" type="datetimeFigureOut">
-              <a:t>6/14/23</a:t>
+              <a:t>11/30/23</a:t>
             </a:fld>
             <a:endParaRPr lang="en-US"/>
           </a:p>
@@ -3323,7 +3325,7 @@
           </a:lstStyle>
           <a:p>
             <a:fld id="{5F491023-0B0A-7041-9F06-D25A50EF063B}" type="datetimeFigureOut">
-              <a:t>6/14/23</a:t>
+              <a:t>11/30/23</a:t>
             </a:fld>
             <a:endParaRPr lang="en-US"/>
           </a:p>
@@ -4980,8 +4982,14 @@
           <p:nvPr/>
         </p:nvPicPr>
         <p:blipFill rotWithShape="1">
-          <a:blip r:embed="rId15"/>
-          <a:srcRect l="15678" t="13597" r="14286" b="11921"/>
+          <a:blip r:embed="rId15" cstate="email">
+            <a:extLst>
+              <a:ext uri="{28A0092B-C50C-407E-A947-70E740481C1C}">
+                <a14:useLocalDpi xmlns:a14="http://schemas.microsoft.com/office/drawing/2010/main"/>
+              </a:ext>
+            </a:extLst>
+          </a:blip>
+          <a:srcRect/>
           <a:stretch/>
         </p:blipFill>
         <p:spPr>
@@ -5348,7 +5356,13 @@
           <p:nvPr/>
         </p:nvPicPr>
         <p:blipFill>
-          <a:blip r:embed="rId2"/>
+          <a:blip r:embed="rId2" cstate="email">
+            <a:extLst>
+              <a:ext uri="{28A0092B-C50C-407E-A947-70E740481C1C}">
+                <a14:useLocalDpi xmlns:a14="http://schemas.microsoft.com/office/drawing/2010/main"/>
+              </a:ext>
+            </a:extLst>
+          </a:blip>
           <a:stretch>
             <a:fillRect/>
           </a:stretch>
@@ -5367,6 +5381,610 @@
     <p:extLst>
       <p:ext uri="{BB962C8B-B14F-4D97-AF65-F5344CB8AC3E}">
         <p14:creationId xmlns:p14="http://schemas.microsoft.com/office/powerpoint/2010/main" val="244353106"/>
+      </p:ext>
+    </p:extLst>
+  </p:cSld>
+  <p:clrMapOvr>
+    <a:masterClrMapping/>
+  </p:clrMapOvr>
+</p:sld>
+</file>
+
+<file path=ppt/slides/slide3.xml><?xml version="1.0" encoding="utf-8"?>
+<p:sld xmlns:a="http://schemas.openxmlformats.org/drawingml/2006/main" xmlns:r="http://schemas.openxmlformats.org/officeDocument/2006/relationships" xmlns:p="http://schemas.openxmlformats.org/presentationml/2006/main">
+  <p:cSld>
+    <p:spTree>
+      <p:nvGrpSpPr>
+        <p:cNvPr id="1" name=""/>
+        <p:cNvGrpSpPr/>
+        <p:nvPr/>
+      </p:nvGrpSpPr>
+      <p:grpSpPr>
+        <a:xfrm>
+          <a:off x="0" y="0"/>
+          <a:ext cx="0" cy="0"/>
+          <a:chOff x="0" y="0"/>
+          <a:chExt cx="0" cy="0"/>
+        </a:xfrm>
+      </p:grpSpPr>
+      <p:sp>
+        <p:nvSpPr>
+          <p:cNvPr id="2" name="TextBox 1">
+            <a:extLst>
+              <a:ext uri="{FF2B5EF4-FFF2-40B4-BE49-F238E27FC236}">
+                <a16:creationId xmlns:a16="http://schemas.microsoft.com/office/drawing/2014/main" id="{EE36FE47-BB4C-FCF2-33ED-2A30345CD962}"/>
+              </a:ext>
+            </a:extLst>
+          </p:cNvPr>
+          <p:cNvSpPr txBox="1"/>
+          <p:nvPr/>
+        </p:nvSpPr>
+        <p:spPr>
+          <a:xfrm>
+            <a:off x="0" y="15037"/>
+            <a:ext cx="1965434" cy="369332"/>
+          </a:xfrm>
+          <a:prstGeom prst="rect">
+            <a:avLst/>
+          </a:prstGeom>
+          <a:noFill/>
+        </p:spPr>
+        <p:txBody>
+          <a:bodyPr wrap="square" rtlCol="0">
+            <a:spAutoFit/>
+          </a:bodyPr>
+          <a:lstStyle/>
+          <a:p>
+            <a:r>
+              <a:rPr lang="en-US" b="1" dirty="0"/>
+              <a:t>Electrical Breaker</a:t>
+            </a:r>
+          </a:p>
+        </p:txBody>
+      </p:sp>
+      <p:sp>
+        <p:nvSpPr>
+          <p:cNvPr id="3" name="TextBox 2">
+            <a:extLst>
+              <a:ext uri="{FF2B5EF4-FFF2-40B4-BE49-F238E27FC236}">
+                <a16:creationId xmlns:a16="http://schemas.microsoft.com/office/drawing/2014/main" id="{ED9793CB-50FF-ABA2-02A3-D95B14ECE23D}"/>
+              </a:ext>
+            </a:extLst>
+          </p:cNvPr>
+          <p:cNvSpPr txBox="1"/>
+          <p:nvPr/>
+        </p:nvSpPr>
+        <p:spPr>
+          <a:xfrm>
+            <a:off x="8679357" y="5002700"/>
+            <a:ext cx="3083692" cy="923330"/>
+          </a:xfrm>
+          <a:prstGeom prst="rect">
+            <a:avLst/>
+          </a:prstGeom>
+          <a:noFill/>
+        </p:spPr>
+        <p:txBody>
+          <a:bodyPr wrap="square" rtlCol="0">
+            <a:spAutoFit/>
+          </a:bodyPr>
+          <a:lstStyle/>
+          <a:p>
+            <a:r>
+              <a:rPr lang="en-US" dirty="0"/>
+              <a:t>We need 50A 2-pole breaker</a:t>
+            </a:r>
+          </a:p>
+          <a:p>
+            <a:r>
+              <a:rPr lang="en-US" dirty="0"/>
+              <a:t>The Panel is compatible with Cutler Hammer standard</a:t>
+            </a:r>
+          </a:p>
+        </p:txBody>
+      </p:sp>
+      <p:pic>
+        <p:nvPicPr>
+          <p:cNvPr id="4" name="Picture 3">
+            <a:extLst>
+              <a:ext uri="{FF2B5EF4-FFF2-40B4-BE49-F238E27FC236}">
+                <a16:creationId xmlns:a16="http://schemas.microsoft.com/office/drawing/2014/main" id="{AB5D2391-A8A3-24F4-696B-8A74248D4A0F}"/>
+              </a:ext>
+            </a:extLst>
+          </p:cNvPr>
+          <p:cNvPicPr>
+            <a:picLocks noChangeAspect="1"/>
+          </p:cNvPicPr>
+          <p:nvPr/>
+        </p:nvPicPr>
+        <p:blipFill>
+          <a:blip r:embed="rId2" cstate="email">
+            <a:extLst>
+              <a:ext uri="{28A0092B-C50C-407E-A947-70E740481C1C}">
+                <a14:useLocalDpi xmlns:a14="http://schemas.microsoft.com/office/drawing/2010/main"/>
+              </a:ext>
+            </a:extLst>
+          </a:blip>
+          <a:stretch>
+            <a:fillRect/>
+          </a:stretch>
+        </p:blipFill>
+        <p:spPr>
+          <a:xfrm>
+            <a:off x="91091" y="1737936"/>
+            <a:ext cx="3083035" cy="3162378"/>
+          </a:xfrm>
+          <a:prstGeom prst="rect">
+            <a:avLst/>
+          </a:prstGeom>
+        </p:spPr>
+      </p:pic>
+      <p:pic>
+        <p:nvPicPr>
+          <p:cNvPr id="5" name="Picture 4">
+            <a:extLst>
+              <a:ext uri="{FF2B5EF4-FFF2-40B4-BE49-F238E27FC236}">
+                <a16:creationId xmlns:a16="http://schemas.microsoft.com/office/drawing/2014/main" id="{9EDFB735-D6A7-67F0-6924-8A25EC0637DD}"/>
+              </a:ext>
+            </a:extLst>
+          </p:cNvPr>
+          <p:cNvPicPr>
+            <a:picLocks noChangeAspect="1"/>
+          </p:cNvPicPr>
+          <p:nvPr/>
+        </p:nvPicPr>
+        <p:blipFill>
+          <a:blip r:embed="rId3" cstate="email">
+            <a:extLst>
+              <a:ext uri="{28A0092B-C50C-407E-A947-70E740481C1C}">
+                <a14:useLocalDpi xmlns:a14="http://schemas.microsoft.com/office/drawing/2010/main"/>
+              </a:ext>
+            </a:extLst>
+          </a:blip>
+          <a:stretch>
+            <a:fillRect/>
+          </a:stretch>
+        </p:blipFill>
+        <p:spPr>
+          <a:xfrm rot="16200000">
+            <a:off x="719379" y="4314038"/>
+            <a:ext cx="1847357" cy="3103935"/>
+          </a:xfrm>
+          <a:prstGeom prst="rect">
+            <a:avLst/>
+          </a:prstGeom>
+        </p:spPr>
+      </p:pic>
+      <p:pic>
+        <p:nvPicPr>
+          <p:cNvPr id="6" name="Picture 5">
+            <a:extLst>
+              <a:ext uri="{FF2B5EF4-FFF2-40B4-BE49-F238E27FC236}">
+                <a16:creationId xmlns:a16="http://schemas.microsoft.com/office/drawing/2014/main" id="{1451E093-C62A-6F22-068D-C20B42191100}"/>
+              </a:ext>
+            </a:extLst>
+          </p:cNvPr>
+          <p:cNvPicPr>
+            <a:picLocks noChangeAspect="1"/>
+          </p:cNvPicPr>
+          <p:nvPr/>
+        </p:nvPicPr>
+        <p:blipFill>
+          <a:blip r:embed="rId4" cstate="email">
+            <a:extLst>
+              <a:ext uri="{28A0092B-C50C-407E-A947-70E740481C1C}">
+                <a14:useLocalDpi xmlns:a14="http://schemas.microsoft.com/office/drawing/2010/main"/>
+              </a:ext>
+            </a:extLst>
+          </a:blip>
+          <a:stretch>
+            <a:fillRect/>
+          </a:stretch>
+        </p:blipFill>
+        <p:spPr>
+          <a:xfrm>
+            <a:off x="3268717" y="3564674"/>
+            <a:ext cx="1902591" cy="3196739"/>
+          </a:xfrm>
+          <a:prstGeom prst="rect">
+            <a:avLst/>
+          </a:prstGeom>
+        </p:spPr>
+      </p:pic>
+      <p:pic>
+        <p:nvPicPr>
+          <p:cNvPr id="7" name="Picture 6">
+            <a:extLst>
+              <a:ext uri="{FF2B5EF4-FFF2-40B4-BE49-F238E27FC236}">
+                <a16:creationId xmlns:a16="http://schemas.microsoft.com/office/drawing/2014/main" id="{EF00A280-0C58-48C6-6374-6950E70484B4}"/>
+              </a:ext>
+            </a:extLst>
+          </p:cNvPr>
+          <p:cNvPicPr>
+            <a:picLocks noChangeAspect="1"/>
+          </p:cNvPicPr>
+          <p:nvPr/>
+        </p:nvPicPr>
+        <p:blipFill>
+          <a:blip r:embed="rId5" cstate="email">
+            <a:extLst>
+              <a:ext uri="{28A0092B-C50C-407E-A947-70E740481C1C}">
+                <a14:useLocalDpi xmlns:a14="http://schemas.microsoft.com/office/drawing/2010/main"/>
+              </a:ext>
+            </a:extLst>
+          </a:blip>
+          <a:stretch>
+            <a:fillRect/>
+          </a:stretch>
+        </p:blipFill>
+        <p:spPr>
+          <a:xfrm>
+            <a:off x="5318574" y="3564674"/>
+            <a:ext cx="1902591" cy="3196739"/>
+          </a:xfrm>
+          <a:prstGeom prst="rect">
+            <a:avLst/>
+          </a:prstGeom>
+        </p:spPr>
+      </p:pic>
+      <p:sp>
+        <p:nvSpPr>
+          <p:cNvPr id="8" name="TextBox 7">
+            <a:extLst>
+              <a:ext uri="{FF2B5EF4-FFF2-40B4-BE49-F238E27FC236}">
+                <a16:creationId xmlns:a16="http://schemas.microsoft.com/office/drawing/2014/main" id="{9A76ECB1-CBC6-46CA-370A-54A0F010E3EC}"/>
+              </a:ext>
+            </a:extLst>
+          </p:cNvPr>
+          <p:cNvSpPr txBox="1"/>
+          <p:nvPr/>
+        </p:nvSpPr>
+        <p:spPr>
+          <a:xfrm>
+            <a:off x="8145517" y="158840"/>
+            <a:ext cx="3920359" cy="1384995"/>
+          </a:xfrm>
+          <a:prstGeom prst="rect">
+            <a:avLst/>
+          </a:prstGeom>
+          <a:noFill/>
+        </p:spPr>
+        <p:txBody>
+          <a:bodyPr wrap="square" rtlCol="0">
+            <a:spAutoFit/>
+          </a:bodyPr>
+          <a:lstStyle/>
+          <a:p>
+            <a:r>
+              <a:rPr lang="en-US" sz="1400"/>
+              <a:t>August 2022 – bought on amazon:</a:t>
+            </a:r>
+          </a:p>
+          <a:p>
+            <a:endParaRPr lang="en-US" sz="1400"/>
+          </a:p>
+          <a:p>
+            <a:r>
+              <a:rPr lang="en-US" sz="1400"/>
+              <a:t>CH250 2-Pole 50-Amp Circuit Breaker, Type CH 3/4-Inch Plug-On Molded Case Circuit Breaker, Thermal Magnetic Protection, 10 KAIC, 120/240V, Fit for Cutler Hammer Load Centers (3 Years Warranty)</a:t>
+            </a:r>
+          </a:p>
+        </p:txBody>
+      </p:sp>
+      <p:pic>
+        <p:nvPicPr>
+          <p:cNvPr id="9" name="Picture 8">
+            <a:extLst>
+              <a:ext uri="{FF2B5EF4-FFF2-40B4-BE49-F238E27FC236}">
+                <a16:creationId xmlns:a16="http://schemas.microsoft.com/office/drawing/2014/main" id="{822E6762-F007-05A8-1499-16EDCBCDF195}"/>
+              </a:ext>
+            </a:extLst>
+          </p:cNvPr>
+          <p:cNvPicPr>
+            <a:picLocks noChangeAspect="1"/>
+          </p:cNvPicPr>
+          <p:nvPr/>
+        </p:nvPicPr>
+        <p:blipFill>
+          <a:blip r:embed="rId6" cstate="email">
+            <a:extLst>
+              <a:ext uri="{28A0092B-C50C-407E-A947-70E740481C1C}">
+                <a14:useLocalDpi xmlns:a14="http://schemas.microsoft.com/office/drawing/2010/main"/>
+              </a:ext>
+            </a:extLst>
+          </a:blip>
+          <a:stretch>
+            <a:fillRect/>
+          </a:stretch>
+        </p:blipFill>
+        <p:spPr>
+          <a:xfrm>
+            <a:off x="8679357" y="1543835"/>
+            <a:ext cx="2755900" cy="2997200"/>
+          </a:xfrm>
+          <a:prstGeom prst="rect">
+            <a:avLst/>
+          </a:prstGeom>
+        </p:spPr>
+      </p:pic>
+      <p:sp>
+        <p:nvSpPr>
+          <p:cNvPr id="10" name="TextBox 9">
+            <a:extLst>
+              <a:ext uri="{FF2B5EF4-FFF2-40B4-BE49-F238E27FC236}">
+                <a16:creationId xmlns:a16="http://schemas.microsoft.com/office/drawing/2014/main" id="{B1CA3A46-1658-9084-396B-2BC71E318A7F}"/>
+              </a:ext>
+            </a:extLst>
+          </p:cNvPr>
+          <p:cNvSpPr txBox="1"/>
+          <p:nvPr/>
+        </p:nvSpPr>
+        <p:spPr>
+          <a:xfrm>
+            <a:off x="252249" y="830320"/>
+            <a:ext cx="6379779" cy="461665"/>
+          </a:xfrm>
+          <a:prstGeom prst="rect">
+            <a:avLst/>
+          </a:prstGeom>
+          <a:noFill/>
+        </p:spPr>
+        <p:txBody>
+          <a:bodyPr wrap="square" rtlCol="0">
+            <a:spAutoFit/>
+          </a:bodyPr>
+          <a:lstStyle/>
+          <a:p>
+            <a:r>
+              <a:rPr lang="en-US" sz="1200" b="0" i="0" dirty="0">
+                <a:solidFill>
+                  <a:srgbClr val="333333"/>
+                </a:solidFill>
+                <a:effectLst/>
+                <a:latin typeface="helvetica-neue"/>
+              </a:rPr>
+              <a:t>Types of Circuit Breakers</a:t>
+            </a:r>
+            <a:endParaRPr lang="en-US" sz="1200" dirty="0">
+              <a:hlinkClick r:id="rId7"/>
+            </a:endParaRPr>
+          </a:p>
+          <a:p>
+            <a:r>
+              <a:rPr lang="en-US" sz="1200" dirty="0">
+                <a:hlinkClick r:id="rId7"/>
+              </a:rPr>
+              <a:t>https://www.homedepot.com/c/ab/types-of-circuit-breakers/9ba683603be9fa5395fab900f0d22b4</a:t>
+            </a:r>
+            <a:endParaRPr lang="en-US" sz="1200" dirty="0"/>
+          </a:p>
+        </p:txBody>
+      </p:sp>
+    </p:spTree>
+    <p:extLst>
+      <p:ext uri="{BB962C8B-B14F-4D97-AF65-F5344CB8AC3E}">
+        <p14:creationId xmlns:p14="http://schemas.microsoft.com/office/powerpoint/2010/main" val="2674537515"/>
+      </p:ext>
+    </p:extLst>
+  </p:cSld>
+  <p:clrMapOvr>
+    <a:masterClrMapping/>
+  </p:clrMapOvr>
+</p:sld>
+</file>
+
+<file path=ppt/slides/slide4.xml><?xml version="1.0" encoding="utf-8"?>
+<p:sld xmlns:a="http://schemas.openxmlformats.org/drawingml/2006/main" xmlns:r="http://schemas.openxmlformats.org/officeDocument/2006/relationships" xmlns:p="http://schemas.openxmlformats.org/presentationml/2006/main">
+  <p:cSld>
+    <p:spTree>
+      <p:nvGrpSpPr>
+        <p:cNvPr id="1" name=""/>
+        <p:cNvGrpSpPr/>
+        <p:nvPr/>
+      </p:nvGrpSpPr>
+      <p:grpSpPr>
+        <a:xfrm>
+          <a:off x="0" y="0"/>
+          <a:ext cx="0" cy="0"/>
+          <a:chOff x="0" y="0"/>
+          <a:chExt cx="0" cy="0"/>
+        </a:xfrm>
+      </p:grpSpPr>
+      <p:sp>
+        <p:nvSpPr>
+          <p:cNvPr id="2" name="TextBox 1">
+            <a:extLst>
+              <a:ext uri="{FF2B5EF4-FFF2-40B4-BE49-F238E27FC236}">
+                <a16:creationId xmlns:a16="http://schemas.microsoft.com/office/drawing/2014/main" id="{EE36FE47-BB4C-FCF2-33ED-2A30345CD962}"/>
+              </a:ext>
+            </a:extLst>
+          </p:cNvPr>
+          <p:cNvSpPr txBox="1"/>
+          <p:nvPr/>
+        </p:nvSpPr>
+        <p:spPr>
+          <a:xfrm>
+            <a:off x="262758" y="283779"/>
+            <a:ext cx="3573517" cy="369332"/>
+          </a:xfrm>
+          <a:prstGeom prst="rect">
+            <a:avLst/>
+          </a:prstGeom>
+          <a:noFill/>
+        </p:spPr>
+        <p:txBody>
+          <a:bodyPr wrap="square" rtlCol="0">
+            <a:spAutoFit/>
+          </a:bodyPr>
+          <a:lstStyle/>
+          <a:p>
+            <a:r>
+              <a:rPr lang="en-US" dirty="0"/>
+              <a:t>Electrical Breaker for dryer</a:t>
+            </a:r>
+          </a:p>
+        </p:txBody>
+      </p:sp>
+      <p:sp>
+        <p:nvSpPr>
+          <p:cNvPr id="8" name="TextBox 7">
+            <a:extLst>
+              <a:ext uri="{FF2B5EF4-FFF2-40B4-BE49-F238E27FC236}">
+                <a16:creationId xmlns:a16="http://schemas.microsoft.com/office/drawing/2014/main" id="{9A76ECB1-CBC6-46CA-370A-54A0F010E3EC}"/>
+              </a:ext>
+            </a:extLst>
+          </p:cNvPr>
+          <p:cNvSpPr txBox="1"/>
+          <p:nvPr/>
+        </p:nvSpPr>
+        <p:spPr>
+          <a:xfrm>
+            <a:off x="8145517" y="158840"/>
+            <a:ext cx="3920359" cy="1384995"/>
+          </a:xfrm>
+          <a:prstGeom prst="rect">
+            <a:avLst/>
+          </a:prstGeom>
+          <a:noFill/>
+        </p:spPr>
+        <p:txBody>
+          <a:bodyPr wrap="square" rtlCol="0">
+            <a:spAutoFit/>
+          </a:bodyPr>
+          <a:lstStyle/>
+          <a:p>
+            <a:r>
+              <a:rPr lang="en-US" sz="1400"/>
+              <a:t>August 2022 – bought on amazon:</a:t>
+            </a:r>
+          </a:p>
+          <a:p>
+            <a:endParaRPr lang="en-US" sz="1400"/>
+          </a:p>
+          <a:p>
+            <a:r>
+              <a:rPr lang="en-US" sz="1400"/>
+              <a:t>CH250 2-Pole 50-Amp Circuit Breaker, Type CH 3/4-Inch Plug-On Molded Case Circuit Breaker, Thermal Magnetic Protection, 10 KAIC, 120/240V, Fit for Cutler Hammer Load Centers (3 Years Warranty)</a:t>
+            </a:r>
+          </a:p>
+        </p:txBody>
+      </p:sp>
+      <p:pic>
+        <p:nvPicPr>
+          <p:cNvPr id="9" name="Picture 8">
+            <a:extLst>
+              <a:ext uri="{FF2B5EF4-FFF2-40B4-BE49-F238E27FC236}">
+                <a16:creationId xmlns:a16="http://schemas.microsoft.com/office/drawing/2014/main" id="{822E6762-F007-05A8-1499-16EDCBCDF195}"/>
+              </a:ext>
+            </a:extLst>
+          </p:cNvPr>
+          <p:cNvPicPr>
+            <a:picLocks noChangeAspect="1"/>
+          </p:cNvPicPr>
+          <p:nvPr/>
+        </p:nvPicPr>
+        <p:blipFill>
+          <a:blip r:embed="rId2" cstate="email">
+            <a:extLst>
+              <a:ext uri="{28A0092B-C50C-407E-A947-70E740481C1C}">
+                <a14:useLocalDpi xmlns:a14="http://schemas.microsoft.com/office/drawing/2010/main"/>
+              </a:ext>
+            </a:extLst>
+          </a:blip>
+          <a:stretch>
+            <a:fillRect/>
+          </a:stretch>
+        </p:blipFill>
+        <p:spPr>
+          <a:xfrm>
+            <a:off x="8679357" y="1543835"/>
+            <a:ext cx="2755900" cy="2997200"/>
+          </a:xfrm>
+          <a:prstGeom prst="rect">
+            <a:avLst/>
+          </a:prstGeom>
+        </p:spPr>
+      </p:pic>
+      <p:sp>
+        <p:nvSpPr>
+          <p:cNvPr id="10" name="TextBox 9">
+            <a:extLst>
+              <a:ext uri="{FF2B5EF4-FFF2-40B4-BE49-F238E27FC236}">
+                <a16:creationId xmlns:a16="http://schemas.microsoft.com/office/drawing/2014/main" id="{33D36EB7-CA5E-7BE6-B2A5-C23D1C25B955}"/>
+              </a:ext>
+            </a:extLst>
+          </p:cNvPr>
+          <p:cNvSpPr txBox="1"/>
+          <p:nvPr/>
+        </p:nvSpPr>
+        <p:spPr>
+          <a:xfrm>
+            <a:off x="262758" y="1011110"/>
+            <a:ext cx="5044965" cy="2308324"/>
+          </a:xfrm>
+          <a:prstGeom prst="rect">
+            <a:avLst/>
+          </a:prstGeom>
+          <a:noFill/>
+        </p:spPr>
+        <p:txBody>
+          <a:bodyPr wrap="square" rtlCol="0">
+            <a:spAutoFit/>
+          </a:bodyPr>
+          <a:lstStyle/>
+          <a:p>
+            <a:r>
+              <a:rPr lang="en-US" dirty="0"/>
+              <a:t>It looks like we need a </a:t>
+            </a:r>
+          </a:p>
+          <a:p>
+            <a:r>
+              <a:rPr lang="en-US" dirty="0"/>
+              <a:t>2-Pole Eaton Interchangeable </a:t>
+            </a:r>
+          </a:p>
+          <a:p>
+            <a:r>
+              <a:rPr lang="en-US" dirty="0"/>
+              <a:t>Circuit Breaker (30A, 120/240V)</a:t>
+            </a:r>
+          </a:p>
+          <a:p>
+            <a:r>
+              <a:rPr lang="en-US" dirty="0"/>
+              <a:t>SKU: BR230</a:t>
+            </a:r>
+          </a:p>
+          <a:p>
+            <a:endParaRPr lang="en-US" dirty="0"/>
+          </a:p>
+          <a:p>
+            <a:r>
+              <a:rPr lang="en-US" dirty="0"/>
+              <a:t>November 2023 – ordered</a:t>
+            </a:r>
+          </a:p>
+          <a:p>
+            <a:r>
+              <a:rPr lang="en-US" b="0" i="0" u="none" strike="noStrike" dirty="0">
+                <a:solidFill>
+                  <a:srgbClr val="007185"/>
+                </a:solidFill>
+                <a:effectLst/>
+                <a:latin typeface="Amazon Ember"/>
+                <a:hlinkClick r:id="rId3"/>
+              </a:rPr>
+              <a:t>Cutler Hammer BR230 2 Pole 30Amp 120/240V Circuit Breaker</a:t>
+            </a:r>
+            <a:endParaRPr lang="en-US" dirty="0"/>
+          </a:p>
+        </p:txBody>
+      </p:sp>
+    </p:spTree>
+    <p:extLst>
+      <p:ext uri="{BB962C8B-B14F-4D97-AF65-F5344CB8AC3E}">
+        <p14:creationId xmlns:p14="http://schemas.microsoft.com/office/powerpoint/2010/main" val="249167957"/>
       </p:ext>
     </p:extLst>
   </p:cSld>

--- a/electric.pptx
+++ b/electric.pptx
@@ -200,7 +200,7 @@
           <a:p>
             <a:fld id="{D2843BDE-B8C0-934E-9704-CBA3B88C1FB8}" type="datetimeFigureOut">
               <a:rPr lang="en-US" smtClean="0"/>
-              <a:t>11/30/23</a:t>
+              <a:t>12/5/23</a:t>
             </a:fld>
             <a:endParaRPr lang="en-US"/>
           </a:p>
@@ -697,7 +697,7 @@
           <a:lstStyle/>
           <a:p>
             <a:fld id="{5F491023-0B0A-7041-9F06-D25A50EF063B}" type="datetimeFigureOut">
-              <a:t>11/30/23</a:t>
+              <a:t>12/5/23</a:t>
             </a:fld>
             <a:endParaRPr lang="en-US"/>
           </a:p>
@@ -893,7 +893,7 @@
           <a:lstStyle/>
           <a:p>
             <a:fld id="{5F491023-0B0A-7041-9F06-D25A50EF063B}" type="datetimeFigureOut">
-              <a:t>11/30/23</a:t>
+              <a:t>12/5/23</a:t>
             </a:fld>
             <a:endParaRPr lang="en-US"/>
           </a:p>
@@ -1099,7 +1099,7 @@
           <a:lstStyle/>
           <a:p>
             <a:fld id="{5F491023-0B0A-7041-9F06-D25A50EF063B}" type="datetimeFigureOut">
-              <a:t>11/30/23</a:t>
+              <a:t>12/5/23</a:t>
             </a:fld>
             <a:endParaRPr lang="en-US"/>
           </a:p>
@@ -1295,7 +1295,7 @@
           <a:lstStyle/>
           <a:p>
             <a:fld id="{5F491023-0B0A-7041-9F06-D25A50EF063B}" type="datetimeFigureOut">
-              <a:t>11/30/23</a:t>
+              <a:t>12/5/23</a:t>
             </a:fld>
             <a:endParaRPr lang="en-US"/>
           </a:p>
@@ -1568,7 +1568,7 @@
           <a:lstStyle/>
           <a:p>
             <a:fld id="{5F491023-0B0A-7041-9F06-D25A50EF063B}" type="datetimeFigureOut">
-              <a:t>11/30/23</a:t>
+              <a:t>12/5/23</a:t>
             </a:fld>
             <a:endParaRPr lang="en-US"/>
           </a:p>
@@ -1831,7 +1831,7 @@
           <a:lstStyle/>
           <a:p>
             <a:fld id="{5F491023-0B0A-7041-9F06-D25A50EF063B}" type="datetimeFigureOut">
-              <a:t>11/30/23</a:t>
+              <a:t>12/5/23</a:t>
             </a:fld>
             <a:endParaRPr lang="en-US"/>
           </a:p>
@@ -2241,7 +2241,7 @@
           <a:lstStyle/>
           <a:p>
             <a:fld id="{5F491023-0B0A-7041-9F06-D25A50EF063B}" type="datetimeFigureOut">
-              <a:t>11/30/23</a:t>
+              <a:t>12/5/23</a:t>
             </a:fld>
             <a:endParaRPr lang="en-US"/>
           </a:p>
@@ -2380,7 +2380,7 @@
           <a:lstStyle/>
           <a:p>
             <a:fld id="{5F491023-0B0A-7041-9F06-D25A50EF063B}" type="datetimeFigureOut">
-              <a:t>11/30/23</a:t>
+              <a:t>12/5/23</a:t>
             </a:fld>
             <a:endParaRPr lang="en-US"/>
           </a:p>
@@ -2491,7 +2491,7 @@
           <a:lstStyle/>
           <a:p>
             <a:fld id="{5F491023-0B0A-7041-9F06-D25A50EF063B}" type="datetimeFigureOut">
-              <a:t>11/30/23</a:t>
+              <a:t>12/5/23</a:t>
             </a:fld>
             <a:endParaRPr lang="en-US"/>
           </a:p>
@@ -2800,7 +2800,7 @@
           <a:lstStyle/>
           <a:p>
             <a:fld id="{5F491023-0B0A-7041-9F06-D25A50EF063B}" type="datetimeFigureOut">
-              <a:t>11/30/23</a:t>
+              <a:t>12/5/23</a:t>
             </a:fld>
             <a:endParaRPr lang="en-US"/>
           </a:p>
@@ -3086,7 +3086,7 @@
           <a:lstStyle/>
           <a:p>
             <a:fld id="{5F491023-0B0A-7041-9F06-D25A50EF063B}" type="datetimeFigureOut">
-              <a:t>11/30/23</a:t>
+              <a:t>12/5/23</a:t>
             </a:fld>
             <a:endParaRPr lang="en-US"/>
           </a:p>
@@ -3325,7 +3325,7 @@
           </a:lstStyle>
           <a:p>
             <a:fld id="{5F491023-0B0A-7041-9F06-D25A50EF063B}" type="datetimeFigureOut">
-              <a:t>11/30/23</a:t>
+              <a:t>12/5/23</a:t>
             </a:fld>
             <a:endParaRPr lang="en-US"/>
           </a:p>
@@ -5981,6 +5981,36 @@
           </a:p>
         </p:txBody>
       </p:sp>
+      <p:pic>
+        <p:nvPicPr>
+          <p:cNvPr id="4" name="Picture 3" descr="A diagram of a wire with text&#10;&#10;Description automatically generated with medium confidence">
+            <a:extLst>
+              <a:ext uri="{FF2B5EF4-FFF2-40B4-BE49-F238E27FC236}">
+                <a16:creationId xmlns:a16="http://schemas.microsoft.com/office/drawing/2014/main" id="{71282A6E-C371-6235-6846-58616853287C}"/>
+              </a:ext>
+            </a:extLst>
+          </p:cNvPr>
+          <p:cNvPicPr>
+            <a:picLocks noChangeAspect="1"/>
+          </p:cNvPicPr>
+          <p:nvPr/>
+        </p:nvPicPr>
+        <p:blipFill>
+          <a:blip r:embed="rId4"/>
+          <a:stretch>
+            <a:fillRect/>
+          </a:stretch>
+        </p:blipFill>
+        <p:spPr>
+          <a:xfrm>
+            <a:off x="1233213" y="3998481"/>
+            <a:ext cx="2279431" cy="2199451"/>
+          </a:xfrm>
+          <a:prstGeom prst="rect">
+            <a:avLst/>
+          </a:prstGeom>
+        </p:spPr>
+      </p:pic>
     </p:spTree>
     <p:extLst>
       <p:ext uri="{BB962C8B-B14F-4D97-AF65-F5344CB8AC3E}">

--- a/electric.pptx
+++ b/electric.pptx
@@ -5,13 +5,15 @@
     <p:sldMasterId id="2147483648" r:id="rId1"/>
   </p:sldMasterIdLst>
   <p:notesMasterIdLst>
-    <p:notesMasterId r:id="rId6"/>
+    <p:notesMasterId r:id="rId8"/>
   </p:notesMasterIdLst>
   <p:sldIdLst>
     <p:sldId id="261" r:id="rId2"/>
-    <p:sldId id="262" r:id="rId3"/>
-    <p:sldId id="260" r:id="rId4"/>
-    <p:sldId id="263" r:id="rId5"/>
+    <p:sldId id="264" r:id="rId3"/>
+    <p:sldId id="262" r:id="rId4"/>
+    <p:sldId id="260" r:id="rId5"/>
+    <p:sldId id="263" r:id="rId6"/>
+    <p:sldId id="265" r:id="rId7"/>
   </p:sldIdLst>
   <p:sldSz cx="12192000" cy="6858000"/>
   <p:notesSz cx="6858000" cy="9144000"/>
@@ -200,7 +202,7 @@
           <a:p>
             <a:fld id="{D2843BDE-B8C0-934E-9704-CBA3B88C1FB8}" type="datetimeFigureOut">
               <a:rPr lang="en-US" smtClean="0"/>
-              <a:t>12/5/23</a:t>
+              <a:t>1/1/24</a:t>
             </a:fld>
             <a:endParaRPr lang="en-US"/>
           </a:p>
@@ -697,7 +699,7 @@
           <a:lstStyle/>
           <a:p>
             <a:fld id="{5F491023-0B0A-7041-9F06-D25A50EF063B}" type="datetimeFigureOut">
-              <a:t>12/5/23</a:t>
+              <a:t>1/1/24</a:t>
             </a:fld>
             <a:endParaRPr lang="en-US"/>
           </a:p>
@@ -893,7 +895,7 @@
           <a:lstStyle/>
           <a:p>
             <a:fld id="{5F491023-0B0A-7041-9F06-D25A50EF063B}" type="datetimeFigureOut">
-              <a:t>12/5/23</a:t>
+              <a:t>1/1/24</a:t>
             </a:fld>
             <a:endParaRPr lang="en-US"/>
           </a:p>
@@ -1099,7 +1101,7 @@
           <a:lstStyle/>
           <a:p>
             <a:fld id="{5F491023-0B0A-7041-9F06-D25A50EF063B}" type="datetimeFigureOut">
-              <a:t>12/5/23</a:t>
+              <a:t>1/1/24</a:t>
             </a:fld>
             <a:endParaRPr lang="en-US"/>
           </a:p>
@@ -1295,7 +1297,7 @@
           <a:lstStyle/>
           <a:p>
             <a:fld id="{5F491023-0B0A-7041-9F06-D25A50EF063B}" type="datetimeFigureOut">
-              <a:t>12/5/23</a:t>
+              <a:t>1/1/24</a:t>
             </a:fld>
             <a:endParaRPr lang="en-US"/>
           </a:p>
@@ -1568,7 +1570,7 @@
           <a:lstStyle/>
           <a:p>
             <a:fld id="{5F491023-0B0A-7041-9F06-D25A50EF063B}" type="datetimeFigureOut">
-              <a:t>12/5/23</a:t>
+              <a:t>1/1/24</a:t>
             </a:fld>
             <a:endParaRPr lang="en-US"/>
           </a:p>
@@ -1831,7 +1833,7 @@
           <a:lstStyle/>
           <a:p>
             <a:fld id="{5F491023-0B0A-7041-9F06-D25A50EF063B}" type="datetimeFigureOut">
-              <a:t>12/5/23</a:t>
+              <a:t>1/1/24</a:t>
             </a:fld>
             <a:endParaRPr lang="en-US"/>
           </a:p>
@@ -2241,7 +2243,7 @@
           <a:lstStyle/>
           <a:p>
             <a:fld id="{5F491023-0B0A-7041-9F06-D25A50EF063B}" type="datetimeFigureOut">
-              <a:t>12/5/23</a:t>
+              <a:t>1/1/24</a:t>
             </a:fld>
             <a:endParaRPr lang="en-US"/>
           </a:p>
@@ -2380,7 +2382,7 @@
           <a:lstStyle/>
           <a:p>
             <a:fld id="{5F491023-0B0A-7041-9F06-D25A50EF063B}" type="datetimeFigureOut">
-              <a:t>12/5/23</a:t>
+              <a:t>1/1/24</a:t>
             </a:fld>
             <a:endParaRPr lang="en-US"/>
           </a:p>
@@ -2491,7 +2493,7 @@
           <a:lstStyle/>
           <a:p>
             <a:fld id="{5F491023-0B0A-7041-9F06-D25A50EF063B}" type="datetimeFigureOut">
-              <a:t>12/5/23</a:t>
+              <a:t>1/1/24</a:t>
             </a:fld>
             <a:endParaRPr lang="en-US"/>
           </a:p>
@@ -2800,7 +2802,7 @@
           <a:lstStyle/>
           <a:p>
             <a:fld id="{5F491023-0B0A-7041-9F06-D25A50EF063B}" type="datetimeFigureOut">
-              <a:t>12/5/23</a:t>
+              <a:t>1/1/24</a:t>
             </a:fld>
             <a:endParaRPr lang="en-US"/>
           </a:p>
@@ -3086,7 +3088,7 @@
           <a:lstStyle/>
           <a:p>
             <a:fld id="{5F491023-0B0A-7041-9F06-D25A50EF063B}" type="datetimeFigureOut">
-              <a:t>12/5/23</a:t>
+              <a:t>1/1/24</a:t>
             </a:fld>
             <a:endParaRPr lang="en-US"/>
           </a:p>
@@ -3325,7 +3327,7 @@
           </a:lstStyle>
           <a:p>
             <a:fld id="{5F491023-0B0A-7041-9F06-D25A50EF063B}" type="datetimeFigureOut">
-              <a:t>12/5/23</a:t>
+              <a:t>1/1/24</a:t>
             </a:fld>
             <a:endParaRPr lang="en-US"/>
           </a:p>
@@ -4994,7 +4996,7 @@
         </p:blipFill>
         <p:spPr>
           <a:xfrm>
-            <a:off x="3803229" y="4920377"/>
+            <a:off x="3803229" y="4668133"/>
             <a:ext cx="547518" cy="1029661"/>
           </a:xfrm>
           <a:prstGeom prst="rect">
@@ -5016,7 +5018,7 @@
         </p:nvSpPr>
         <p:spPr>
           <a:xfrm>
-            <a:off x="3265065" y="5930891"/>
+            <a:off x="3247404" y="5752114"/>
             <a:ext cx="1726425" cy="523220"/>
           </a:xfrm>
           <a:prstGeom prst="rect">
@@ -5081,8 +5083,8 @@
         </p:nvSpPr>
         <p:spPr>
           <a:xfrm>
-            <a:off x="174170" y="3069099"/>
-            <a:ext cx="5203371" cy="3108543"/>
+            <a:off x="109012" y="538949"/>
+            <a:ext cx="4237077" cy="1169551"/>
           </a:xfrm>
           <a:prstGeom prst="rect">
             <a:avLst/>
@@ -5106,71 +5108,146 @@
           <a:lstStyle/>
           <a:p>
             <a:r>
-              <a:rPr lang="en-US" sz="1400" b="0" i="0" dirty="0">
-                <a:solidFill>
-                  <a:srgbClr val="232629"/>
+              <a:rPr lang="en-US" sz="1400" b="1" i="0" dirty="0">
+                <a:solidFill>
+                  <a:srgbClr val="FF0000"/>
                 </a:solidFill>
                 <a:effectLst/>
                 <a:latin typeface="-apple-system"/>
               </a:rPr>
-              <a:t>Push-in wiring, sometimes branded "</a:t>
-            </a:r>
-            <a:r>
-              <a:rPr lang="en-US" sz="1400" b="1" i="0" dirty="0" err="1">
-                <a:solidFill>
-                  <a:srgbClr val="00B050"/>
+              <a:t>Residential</a:t>
+            </a:r>
+            <a:r>
+              <a:rPr lang="en-US" sz="1400" b="0" i="0" dirty="0">
+                <a:solidFill>
+                  <a:srgbClr val="232629"/>
                 </a:solidFill>
                 <a:effectLst/>
                 <a:latin typeface="-apple-system"/>
               </a:rPr>
-              <a:t>QuickWire</a:t>
-            </a:r>
-            <a:r>
-              <a:rPr lang="en-US" sz="1400" b="0" i="0" dirty="0">
-                <a:solidFill>
-                  <a:srgbClr val="232629"/>
+              <a:t> outlets – cheapest</a:t>
+            </a:r>
+          </a:p>
+          <a:p>
+            <a:r>
+              <a:rPr lang="en-US" sz="1400" b="1" i="0" dirty="0">
+                <a:solidFill>
+                  <a:srgbClr val="FF0000"/>
                 </a:solidFill>
                 <a:effectLst/>
                 <a:latin typeface="-apple-system"/>
               </a:rPr>
-              <a:t>", uses holes in the plastic casing, underneath which are sharp spring-loaded cleats that catch and hold the wire when you put it in. It compresses on the wire more when </a:t>
-            </a:r>
-            <a:r>
-              <a:rPr lang="en-US" sz="1400" dirty="0"/>
-              <a:t>the side screw is tightened. </a:t>
-            </a:r>
-          </a:p>
-          <a:p>
-            <a:endParaRPr lang="en-US" sz="1400" dirty="0"/>
-          </a:p>
-          <a:p>
-            <a:r>
-              <a:rPr lang="en-US" sz="1400" dirty="0"/>
-              <a:t>Most electrician I know uses the back connections on GFI's and side wires regular receptacles. </a:t>
-            </a:r>
-          </a:p>
-          <a:p>
-            <a:endParaRPr lang="en-US" sz="1400" dirty="0"/>
-          </a:p>
-          <a:p>
-            <a:r>
-              <a:rPr lang="en-US" sz="1400" dirty="0"/>
-              <a:t>When inserting the wire, release the screw and tip the device so the grab plates would open. </a:t>
-            </a:r>
-          </a:p>
-          <a:p>
-            <a:endParaRPr lang="en-US" sz="1400" dirty="0"/>
-          </a:p>
-          <a:p>
-            <a:r>
-              <a:rPr lang="en-US" sz="1400" b="0" i="0" dirty="0">
-                <a:solidFill>
-                  <a:srgbClr val="232629"/>
+              <a:t>Commercial / </a:t>
+            </a:r>
+            <a:r>
+              <a:rPr lang="en-US" sz="1400" b="1" dirty="0" err="1">
+                <a:solidFill>
+                  <a:srgbClr val="FF0000"/>
+                </a:solidFill>
+                <a:latin typeface="-apple-system"/>
+              </a:rPr>
+              <a:t>I</a:t>
+            </a:r>
+            <a:r>
+              <a:rPr lang="en-US" sz="1400" b="1" i="0" dirty="0" err="1">
+                <a:solidFill>
+                  <a:srgbClr val="FF0000"/>
                 </a:solidFill>
                 <a:effectLst/>
                 <a:latin typeface="-apple-system"/>
               </a:rPr>
-              <a:t>To remove them, you take a jeweler's screwdriver or a small pick or probe and push into a square tab nearby, which pushes the cleat away allowing you to withdraw the wire. </a:t>
+              <a:t>ndustrical</a:t>
+            </a:r>
+            <a:r>
+              <a:rPr lang="en-US" sz="1400" b="1" i="0" dirty="0">
+                <a:solidFill>
+                  <a:srgbClr val="FF0000"/>
+                </a:solidFill>
+                <a:effectLst/>
+                <a:latin typeface="-apple-system"/>
+              </a:rPr>
+              <a:t> grade </a:t>
+            </a:r>
+            <a:r>
+              <a:rPr lang="en-US" sz="1400" b="0" i="0" dirty="0">
+                <a:solidFill>
+                  <a:srgbClr val="232629"/>
+                </a:solidFill>
+                <a:effectLst/>
+                <a:latin typeface="-apple-system"/>
+              </a:rPr>
+              <a:t>outlets - better</a:t>
+            </a:r>
+          </a:p>
+          <a:p>
+            <a:r>
+              <a:rPr lang="en-US" sz="1400" b="1" i="0" dirty="0">
+                <a:solidFill>
+                  <a:srgbClr val="FF0000"/>
+                </a:solidFill>
+                <a:effectLst/>
+                <a:latin typeface="-apple-system"/>
+              </a:rPr>
+              <a:t>TR = Tamper-Resistant </a:t>
+            </a:r>
+            <a:r>
+              <a:rPr lang="en-US" sz="1400" b="0" i="0" dirty="0">
+                <a:solidFill>
+                  <a:srgbClr val="232629"/>
+                </a:solidFill>
+                <a:effectLst/>
+                <a:latin typeface="-apple-system"/>
+              </a:rPr>
+              <a:t>(plastic safety cover inside)</a:t>
+            </a:r>
+          </a:p>
+          <a:p>
+            <a:r>
+              <a:rPr lang="en-US" sz="1400" b="1" i="0" dirty="0">
+                <a:solidFill>
+                  <a:srgbClr val="FF0000"/>
+                </a:solidFill>
+                <a:effectLst/>
+                <a:latin typeface="-apple-system"/>
+              </a:rPr>
+              <a:t>WR = Weather-resistant </a:t>
+            </a:r>
+            <a:r>
+              <a:rPr lang="en-US" sz="1400" dirty="0">
+                <a:solidFill>
+                  <a:srgbClr val="232629"/>
+                </a:solidFill>
+                <a:latin typeface="-apple-system"/>
+              </a:rPr>
+              <a:t>- </a:t>
+            </a:r>
+            <a:r>
+              <a:rPr lang="en-US" sz="1400" b="0" i="0" dirty="0">
+                <a:solidFill>
+                  <a:srgbClr val="232629"/>
+                </a:solidFill>
+                <a:effectLst/>
+                <a:latin typeface="-apple-system"/>
+              </a:rPr>
+              <a:t>corrosion-resistant materials</a:t>
+            </a:r>
+            <a:endParaRPr lang="en-US" sz="1400" dirty="0">
+              <a:solidFill>
+                <a:srgbClr val="232629"/>
+              </a:solidFill>
+              <a:latin typeface="-apple-system"/>
+            </a:endParaRPr>
+          </a:p>
+          <a:p>
+            <a:r>
+              <a:rPr lang="en-US" sz="1400" b="0" i="0" dirty="0">
+                <a:solidFill>
+                  <a:srgbClr val="232629"/>
+                </a:solidFill>
+                <a:effectLst/>
+                <a:latin typeface="-apple-system"/>
+              </a:rPr>
+              <a:t>Good choice – buy commercial grade TR outlets</a:t>
             </a:r>
           </a:p>
         </p:txBody>
@@ -5189,8 +5266,8 @@
         </p:nvSpPr>
         <p:spPr>
           <a:xfrm>
-            <a:off x="5519058" y="3077097"/>
-            <a:ext cx="6400801" cy="1600438"/>
+            <a:off x="269326" y="6508792"/>
+            <a:ext cx="742594" cy="307777"/>
           </a:xfrm>
           <a:prstGeom prst="rect">
             <a:avLst/>
@@ -5213,7 +5290,16 @@
           </a:bodyPr>
           <a:lstStyle/>
           <a:p>
-            <a:pPr algn="l" fontAlgn="base"/>
+            <a:pPr algn="ctr" fontAlgn="base"/>
+            <a:r>
+              <a:rPr lang="en-US" sz="1400" dirty="0">
+                <a:solidFill>
+                  <a:srgbClr val="232629"/>
+                </a:solidFill>
+                <a:latin typeface="-apple-system"/>
+              </a:rPr>
+              <a:t>1</a:t>
+            </a:r>
             <a:r>
               <a:rPr lang="en-US" sz="1400" b="0" i="0" dirty="0">
                 <a:solidFill>
@@ -5222,45 +5308,8 @@
                 <a:effectLst/>
                 <a:latin typeface="-apple-system"/>
               </a:rPr>
-              <a:t>Many people hate "push-in"</a:t>
-            </a:r>
-            <a:r>
-              <a:rPr lang="en-US" sz="1400" dirty="0">
-                <a:solidFill>
-                  <a:srgbClr val="232629"/>
-                </a:solidFill>
-                <a:latin typeface="-apple-system"/>
-              </a:rPr>
-              <a:t> because:</a:t>
-            </a:r>
-          </a:p>
-          <a:p>
-            <a:pPr algn="l" fontAlgn="base"/>
-            <a:r>
-              <a:rPr lang="en-US" sz="1400" b="0" i="0" dirty="0">
-                <a:solidFill>
-                  <a:srgbClr val="232629"/>
-                </a:solidFill>
-                <a:effectLst/>
-                <a:latin typeface="-apple-system"/>
-              </a:rPr>
-              <a:t> .. they are designed to work only with one gauge of wire (either 12 or 14AWG depending on the type of switch or outlet). </a:t>
-            </a:r>
-          </a:p>
-          <a:p>
-            <a:pPr algn="l" fontAlgn="base"/>
-            <a:r>
-              <a:rPr lang="en-US" sz="1400" dirty="0">
-                <a:solidFill>
-                  <a:srgbClr val="232629"/>
-                </a:solidFill>
-                <a:latin typeface="-apple-system"/>
-              </a:rPr>
-              <a:t> .. getting the wire out of the hole without damaging it is difficult</a:t>
-            </a:r>
-          </a:p>
-          <a:p>
-            <a:pPr algn="l" fontAlgn="base"/>
+              <a:t>0A</a:t>
+            </a:r>
             <a:endParaRPr lang="en-US" sz="1400" dirty="0">
               <a:solidFill>
                 <a:srgbClr val="232629"/>
@@ -5268,18 +5317,6 @@
               <a:latin typeface="-apple-system"/>
             </a:endParaRPr>
           </a:p>
-          <a:p>
-            <a:pPr algn="l" fontAlgn="base"/>
-            <a:r>
-              <a:rPr lang="en-US" sz="1400" dirty="0">
-                <a:solidFill>
-                  <a:srgbClr val="232629"/>
-                </a:solidFill>
-                <a:latin typeface="-apple-system"/>
-              </a:rPr>
-              <a:t>It is safer to use the side-clamping. Make sure to add isolation tape to prevent shorting on metal parts of bare ground.</a:t>
-            </a:r>
-          </a:p>
         </p:txBody>
       </p:sp>
       <p:sp>
@@ -5317,25 +5354,7 @@
                 </a:solidFill>
                 <a:effectLst/>
               </a:rPr>
-              <a:t>"Push-in" </a:t>
-            </a:r>
-            <a:r>
-              <a:rPr lang="en-US" sz="2800" b="1" i="0" dirty="0" err="1">
-                <a:solidFill>
-                  <a:srgbClr val="232629"/>
-                </a:solidFill>
-                <a:effectLst/>
-              </a:rPr>
-              <a:t>QuickWire</a:t>
-            </a:r>
-            <a:r>
-              <a:rPr lang="en-US" sz="2800" b="1" i="0" dirty="0">
-                <a:solidFill>
-                  <a:srgbClr val="232629"/>
-                </a:solidFill>
-                <a:effectLst/>
-              </a:rPr>
-              <a:t> terminals</a:t>
+              <a:t>Outlets</a:t>
             </a:r>
             <a:endParaRPr lang="en-US" sz="2800" b="1" dirty="0"/>
           </a:p>
@@ -5343,10 +5362,479 @@
       </p:sp>
       <p:pic>
         <p:nvPicPr>
-          <p:cNvPr id="8" name="Picture 7">
-            <a:extLst>
-              <a:ext uri="{FF2B5EF4-FFF2-40B4-BE49-F238E27FC236}">
-                <a16:creationId xmlns:a16="http://schemas.microsoft.com/office/drawing/2014/main" id="{B9C42EFB-0833-F87B-7B76-A38CD6C296C7}"/>
+          <p:cNvPr id="1026" name="Picture 2" descr="NEMA 14-30R">
+            <a:extLst>
+              <a:ext uri="{FF2B5EF4-FFF2-40B4-BE49-F238E27FC236}">
+                <a16:creationId xmlns:a16="http://schemas.microsoft.com/office/drawing/2014/main" id="{B72085C4-0034-DB7F-64E6-9D5AD0DC444F}"/>
+              </a:ext>
+            </a:extLst>
+          </p:cNvPr>
+          <p:cNvPicPr>
+            <a:picLocks noChangeAspect="1" noChangeArrowheads="1"/>
+          </p:cNvPicPr>
+          <p:nvPr/>
+        </p:nvPicPr>
+        <p:blipFill rotWithShape="1">
+          <a:blip r:embed="rId2" cstate="email">
+            <a:extLst>
+              <a:ext uri="{28A0092B-C50C-407E-A947-70E740481C1C}">
+                <a14:useLocalDpi xmlns:a14="http://schemas.microsoft.com/office/drawing/2010/main"/>
+              </a:ext>
+            </a:extLst>
+          </a:blip>
+          <a:srcRect/>
+          <a:stretch/>
+        </p:blipFill>
+        <p:spPr bwMode="auto">
+          <a:xfrm>
+            <a:off x="6874136" y="4169028"/>
+            <a:ext cx="1688951" cy="2222500"/>
+          </a:xfrm>
+          <a:prstGeom prst="rect">
+            <a:avLst/>
+          </a:prstGeom>
+          <a:noFill/>
+          <a:extLst>
+            <a:ext uri="{909E8E84-426E-40DD-AFC4-6F175D3DCCD1}">
+              <a14:hiddenFill xmlns:a14="http://schemas.microsoft.com/office/drawing/2010/main">
+                <a:solidFill>
+                  <a:srgbClr val="FFFFFF"/>
+                </a:solidFill>
+              </a14:hiddenFill>
+            </a:ext>
+          </a:extLst>
+        </p:spPr>
+      </p:pic>
+      <p:pic>
+        <p:nvPicPr>
+          <p:cNvPr id="1028" name="Picture 4" descr="NEMA 14-50R">
+            <a:extLst>
+              <a:ext uri="{FF2B5EF4-FFF2-40B4-BE49-F238E27FC236}">
+                <a16:creationId xmlns:a16="http://schemas.microsoft.com/office/drawing/2014/main" id="{1801CFA2-7086-034C-C228-F8F763048931}"/>
+              </a:ext>
+            </a:extLst>
+          </p:cNvPr>
+          <p:cNvPicPr>
+            <a:picLocks noChangeAspect="1" noChangeArrowheads="1"/>
+          </p:cNvPicPr>
+          <p:nvPr/>
+        </p:nvPicPr>
+        <p:blipFill rotWithShape="1">
+          <a:blip r:embed="rId3" cstate="email">
+            <a:extLst>
+              <a:ext uri="{28A0092B-C50C-407E-A947-70E740481C1C}">
+                <a14:useLocalDpi xmlns:a14="http://schemas.microsoft.com/office/drawing/2010/main"/>
+              </a:ext>
+            </a:extLst>
+          </a:blip>
+          <a:srcRect/>
+          <a:stretch/>
+        </p:blipFill>
+        <p:spPr bwMode="auto">
+          <a:xfrm>
+            <a:off x="9416413" y="4169028"/>
+            <a:ext cx="1688951" cy="2222500"/>
+          </a:xfrm>
+          <a:prstGeom prst="rect">
+            <a:avLst/>
+          </a:prstGeom>
+          <a:noFill/>
+          <a:extLst>
+            <a:ext uri="{909E8E84-426E-40DD-AFC4-6F175D3DCCD1}">
+              <a14:hiddenFill xmlns:a14="http://schemas.microsoft.com/office/drawing/2010/main">
+                <a:solidFill>
+                  <a:srgbClr val="FFFFFF"/>
+                </a:solidFill>
+              </a14:hiddenFill>
+            </a:ext>
+          </a:extLst>
+        </p:spPr>
+      </p:pic>
+      <p:sp>
+        <p:nvSpPr>
+          <p:cNvPr id="2" name="TextBox 1">
+            <a:extLst>
+              <a:ext uri="{FF2B5EF4-FFF2-40B4-BE49-F238E27FC236}">
+                <a16:creationId xmlns:a16="http://schemas.microsoft.com/office/drawing/2014/main" id="{F22F20EA-A678-B358-841D-EF5ECC0157AD}"/>
+              </a:ext>
+            </a:extLst>
+          </p:cNvPr>
+          <p:cNvSpPr txBox="1"/>
+          <p:nvPr/>
+        </p:nvSpPr>
+        <p:spPr>
+          <a:xfrm>
+            <a:off x="9866941" y="6508793"/>
+            <a:ext cx="742594" cy="307777"/>
+          </a:xfrm>
+          <a:prstGeom prst="rect">
+            <a:avLst/>
+          </a:prstGeom>
+          <a:solidFill>
+            <a:schemeClr val="accent4">
+              <a:lumMod val="20000"/>
+              <a:lumOff val="80000"/>
+            </a:schemeClr>
+          </a:solidFill>
+          <a:ln>
+            <a:solidFill>
+              <a:srgbClr val="FF0000"/>
+            </a:solidFill>
+          </a:ln>
+        </p:spPr>
+        <p:txBody>
+          <a:bodyPr wrap="square" rtlCol="0">
+            <a:spAutoFit/>
+          </a:bodyPr>
+          <a:lstStyle/>
+          <a:p>
+            <a:pPr algn="ctr" fontAlgn="base"/>
+            <a:r>
+              <a:rPr lang="en-US" sz="1400" dirty="0">
+                <a:solidFill>
+                  <a:srgbClr val="232629"/>
+                </a:solidFill>
+                <a:latin typeface="-apple-system"/>
+              </a:rPr>
+              <a:t>5</a:t>
+            </a:r>
+            <a:r>
+              <a:rPr lang="en-US" sz="1400" b="0" i="0" dirty="0">
+                <a:solidFill>
+                  <a:srgbClr val="232629"/>
+                </a:solidFill>
+                <a:effectLst/>
+                <a:latin typeface="-apple-system"/>
+              </a:rPr>
+              <a:t>0A</a:t>
+            </a:r>
+            <a:endParaRPr lang="en-US" sz="1400" dirty="0">
+              <a:solidFill>
+                <a:srgbClr val="232629"/>
+              </a:solidFill>
+              <a:latin typeface="-apple-system"/>
+            </a:endParaRPr>
+          </a:p>
+        </p:txBody>
+      </p:sp>
+      <p:pic>
+        <p:nvPicPr>
+          <p:cNvPr id="1030" name="Picture 6" descr="NEMA 5-15R">
+            <a:extLst>
+              <a:ext uri="{FF2B5EF4-FFF2-40B4-BE49-F238E27FC236}">
+                <a16:creationId xmlns:a16="http://schemas.microsoft.com/office/drawing/2014/main" id="{B7418EF8-ABD6-CB9A-D5DE-6ADC0E80A828}"/>
+              </a:ext>
+            </a:extLst>
+          </p:cNvPr>
+          <p:cNvPicPr>
+            <a:picLocks noChangeAspect="1" noChangeArrowheads="1"/>
+          </p:cNvPicPr>
+          <p:nvPr/>
+        </p:nvPicPr>
+        <p:blipFill rotWithShape="1">
+          <a:blip r:embed="rId4" cstate="email">
+            <a:extLst>
+              <a:ext uri="{28A0092B-C50C-407E-A947-70E740481C1C}">
+                <a14:useLocalDpi xmlns:a14="http://schemas.microsoft.com/office/drawing/2010/main"/>
+              </a:ext>
+            </a:extLst>
+          </a:blip>
+          <a:srcRect/>
+          <a:stretch/>
+        </p:blipFill>
+        <p:spPr bwMode="auto">
+          <a:xfrm>
+            <a:off x="193637" y="4164675"/>
+            <a:ext cx="935916" cy="2222500"/>
+          </a:xfrm>
+          <a:prstGeom prst="rect">
+            <a:avLst/>
+          </a:prstGeom>
+          <a:noFill/>
+          <a:extLst>
+            <a:ext uri="{909E8E84-426E-40DD-AFC4-6F175D3DCCD1}">
+              <a14:hiddenFill xmlns:a14="http://schemas.microsoft.com/office/drawing/2010/main">
+                <a:solidFill>
+                  <a:srgbClr val="FFFFFF"/>
+                </a:solidFill>
+              </a14:hiddenFill>
+            </a:ext>
+          </a:extLst>
+        </p:spPr>
+      </p:pic>
+      <p:pic>
+        <p:nvPicPr>
+          <p:cNvPr id="1032" name="Picture 8" descr="NEMA 5-20R">
+            <a:extLst>
+              <a:ext uri="{FF2B5EF4-FFF2-40B4-BE49-F238E27FC236}">
+                <a16:creationId xmlns:a16="http://schemas.microsoft.com/office/drawing/2014/main" id="{60A9C882-6E07-88FF-F0EE-6B55755F9DA9}"/>
+              </a:ext>
+            </a:extLst>
+          </p:cNvPr>
+          <p:cNvPicPr>
+            <a:picLocks noChangeAspect="1" noChangeArrowheads="1"/>
+          </p:cNvPicPr>
+          <p:nvPr/>
+        </p:nvPicPr>
+        <p:blipFill rotWithShape="1">
+          <a:blip r:embed="rId5" cstate="email">
+            <a:extLst>
+              <a:ext uri="{28A0092B-C50C-407E-A947-70E740481C1C}">
+                <a14:useLocalDpi xmlns:a14="http://schemas.microsoft.com/office/drawing/2010/main"/>
+              </a:ext>
+            </a:extLst>
+          </a:blip>
+          <a:srcRect/>
+          <a:stretch/>
+        </p:blipFill>
+        <p:spPr bwMode="auto">
+          <a:xfrm>
+            <a:off x="1398493" y="4164675"/>
+            <a:ext cx="935916" cy="2222500"/>
+          </a:xfrm>
+          <a:prstGeom prst="rect">
+            <a:avLst/>
+          </a:prstGeom>
+          <a:noFill/>
+          <a:extLst>
+            <a:ext uri="{909E8E84-426E-40DD-AFC4-6F175D3DCCD1}">
+              <a14:hiddenFill xmlns:a14="http://schemas.microsoft.com/office/drawing/2010/main">
+                <a:solidFill>
+                  <a:srgbClr val="FFFFFF"/>
+                </a:solidFill>
+              </a14:hiddenFill>
+            </a:ext>
+          </a:extLst>
+        </p:spPr>
+      </p:pic>
+      <p:sp>
+        <p:nvSpPr>
+          <p:cNvPr id="3" name="TextBox 2">
+            <a:extLst>
+              <a:ext uri="{FF2B5EF4-FFF2-40B4-BE49-F238E27FC236}">
+                <a16:creationId xmlns:a16="http://schemas.microsoft.com/office/drawing/2014/main" id="{53DB75FE-B7EB-D49E-987A-987729E55732}"/>
+              </a:ext>
+            </a:extLst>
+          </p:cNvPr>
+          <p:cNvSpPr txBox="1"/>
+          <p:nvPr/>
+        </p:nvSpPr>
+        <p:spPr>
+          <a:xfrm>
+            <a:off x="1504849" y="6502027"/>
+            <a:ext cx="742594" cy="307777"/>
+          </a:xfrm>
+          <a:prstGeom prst="rect">
+            <a:avLst/>
+          </a:prstGeom>
+          <a:solidFill>
+            <a:schemeClr val="accent4">
+              <a:lumMod val="20000"/>
+              <a:lumOff val="80000"/>
+            </a:schemeClr>
+          </a:solidFill>
+          <a:ln>
+            <a:solidFill>
+              <a:srgbClr val="FF0000"/>
+            </a:solidFill>
+          </a:ln>
+        </p:spPr>
+        <p:txBody>
+          <a:bodyPr wrap="square" rtlCol="0">
+            <a:spAutoFit/>
+          </a:bodyPr>
+          <a:lstStyle/>
+          <a:p>
+            <a:pPr algn="ctr" fontAlgn="base"/>
+            <a:r>
+              <a:rPr lang="en-US" sz="1400" dirty="0">
+                <a:solidFill>
+                  <a:srgbClr val="232629"/>
+                </a:solidFill>
+                <a:latin typeface="-apple-system"/>
+              </a:rPr>
+              <a:t>2</a:t>
+            </a:r>
+            <a:r>
+              <a:rPr lang="en-US" sz="1400" b="0" i="0" dirty="0">
+                <a:solidFill>
+                  <a:srgbClr val="232629"/>
+                </a:solidFill>
+                <a:effectLst/>
+                <a:latin typeface="-apple-system"/>
+              </a:rPr>
+              <a:t>0A</a:t>
+            </a:r>
+            <a:endParaRPr lang="en-US" sz="1400" dirty="0">
+              <a:solidFill>
+                <a:srgbClr val="232629"/>
+              </a:solidFill>
+              <a:latin typeface="-apple-system"/>
+            </a:endParaRPr>
+          </a:p>
+        </p:txBody>
+      </p:sp>
+      <p:sp>
+        <p:nvSpPr>
+          <p:cNvPr id="4" name="TextBox 3">
+            <a:extLst>
+              <a:ext uri="{FF2B5EF4-FFF2-40B4-BE49-F238E27FC236}">
+                <a16:creationId xmlns:a16="http://schemas.microsoft.com/office/drawing/2014/main" id="{2529602C-C238-4A64-B43F-4DD3CC785968}"/>
+              </a:ext>
+            </a:extLst>
+          </p:cNvPr>
+          <p:cNvSpPr txBox="1"/>
+          <p:nvPr/>
+        </p:nvSpPr>
+        <p:spPr>
+          <a:xfrm>
+            <a:off x="7372960" y="6502028"/>
+            <a:ext cx="742594" cy="307777"/>
+          </a:xfrm>
+          <a:prstGeom prst="rect">
+            <a:avLst/>
+          </a:prstGeom>
+          <a:solidFill>
+            <a:schemeClr val="accent4">
+              <a:lumMod val="20000"/>
+              <a:lumOff val="80000"/>
+            </a:schemeClr>
+          </a:solidFill>
+          <a:ln>
+            <a:solidFill>
+              <a:srgbClr val="FF0000"/>
+            </a:solidFill>
+          </a:ln>
+        </p:spPr>
+        <p:txBody>
+          <a:bodyPr wrap="square" rtlCol="0">
+            <a:spAutoFit/>
+          </a:bodyPr>
+          <a:lstStyle/>
+          <a:p>
+            <a:pPr algn="ctr" fontAlgn="base"/>
+            <a:r>
+              <a:rPr lang="en-US" sz="1400" b="0" i="0" dirty="0">
+                <a:solidFill>
+                  <a:srgbClr val="232629"/>
+                </a:solidFill>
+                <a:effectLst/>
+                <a:latin typeface="-apple-system"/>
+              </a:rPr>
+              <a:t>30A</a:t>
+            </a:r>
+            <a:endParaRPr lang="en-US" sz="1400" dirty="0">
+              <a:solidFill>
+                <a:srgbClr val="232629"/>
+              </a:solidFill>
+              <a:latin typeface="-apple-system"/>
+            </a:endParaRPr>
+          </a:p>
+        </p:txBody>
+      </p:sp>
+      <p:pic>
+        <p:nvPicPr>
+          <p:cNvPr id="1034" name="Picture 10" descr="gfi outlet">
+            <a:extLst>
+              <a:ext uri="{FF2B5EF4-FFF2-40B4-BE49-F238E27FC236}">
+                <a16:creationId xmlns:a16="http://schemas.microsoft.com/office/drawing/2014/main" id="{F02BD734-7277-AE01-B367-A7E08AE61292}"/>
+              </a:ext>
+            </a:extLst>
+          </p:cNvPr>
+          <p:cNvPicPr>
+            <a:picLocks noChangeAspect="1" noChangeArrowheads="1"/>
+          </p:cNvPicPr>
+          <p:nvPr/>
+        </p:nvPicPr>
+        <p:blipFill rotWithShape="1">
+          <a:blip r:embed="rId6" cstate="email">
+            <a:extLst>
+              <a:ext uri="{28A0092B-C50C-407E-A947-70E740481C1C}">
+                <a14:useLocalDpi xmlns:a14="http://schemas.microsoft.com/office/drawing/2010/main"/>
+              </a:ext>
+            </a:extLst>
+          </a:blip>
+          <a:srcRect/>
+          <a:stretch/>
+        </p:blipFill>
+        <p:spPr bwMode="auto">
+          <a:xfrm>
+            <a:off x="3831621" y="4327847"/>
+            <a:ext cx="852179" cy="2090538"/>
+          </a:xfrm>
+          <a:prstGeom prst="rect">
+            <a:avLst/>
+          </a:prstGeom>
+          <a:noFill/>
+          <a:extLst>
+            <a:ext uri="{909E8E84-426E-40DD-AFC4-6F175D3DCCD1}">
+              <a14:hiddenFill xmlns:a14="http://schemas.microsoft.com/office/drawing/2010/main">
+                <a:solidFill>
+                  <a:srgbClr val="FFFFFF"/>
+                </a:solidFill>
+              </a14:hiddenFill>
+            </a:ext>
+          </a:extLst>
+        </p:spPr>
+      </p:pic>
+      <p:sp>
+        <p:nvSpPr>
+          <p:cNvPr id="9" name="TextBox 8">
+            <a:extLst>
+              <a:ext uri="{FF2B5EF4-FFF2-40B4-BE49-F238E27FC236}">
+                <a16:creationId xmlns:a16="http://schemas.microsoft.com/office/drawing/2014/main" id="{D4E8172E-767B-6E9A-D231-7863C56624E0}"/>
+              </a:ext>
+            </a:extLst>
+          </p:cNvPr>
+          <p:cNvSpPr txBox="1"/>
+          <p:nvPr/>
+        </p:nvSpPr>
+        <p:spPr>
+          <a:xfrm>
+            <a:off x="2919538" y="6502027"/>
+            <a:ext cx="3362928" cy="307777"/>
+          </a:xfrm>
+          <a:prstGeom prst="rect">
+            <a:avLst/>
+          </a:prstGeom>
+          <a:solidFill>
+            <a:schemeClr val="accent4">
+              <a:lumMod val="20000"/>
+              <a:lumOff val="80000"/>
+            </a:schemeClr>
+          </a:solidFill>
+          <a:ln>
+            <a:solidFill>
+              <a:srgbClr val="FF0000"/>
+            </a:solidFill>
+          </a:ln>
+        </p:spPr>
+        <p:txBody>
+          <a:bodyPr wrap="square" rtlCol="0">
+            <a:spAutoFit/>
+          </a:bodyPr>
+          <a:lstStyle/>
+          <a:p>
+            <a:pPr algn="l"/>
+            <a:r>
+              <a:rPr lang="en-US" sz="1400" b="0" i="0" dirty="0">
+                <a:solidFill>
+                  <a:srgbClr val="222222"/>
+                </a:solidFill>
+                <a:effectLst/>
+                <a:latin typeface="Source Sans Pro" panose="020B0503030403020204" pitchFamily="34" charset="0"/>
+              </a:rPr>
+              <a:t>Ground Fault Circuit Interrupters (GFCIs)</a:t>
+            </a:r>
+          </a:p>
+        </p:txBody>
+      </p:sp>
+      <p:pic>
+        <p:nvPicPr>
+          <p:cNvPr id="10" name="Picture 9">
+            <a:extLst>
+              <a:ext uri="{FF2B5EF4-FFF2-40B4-BE49-F238E27FC236}">
+                <a16:creationId xmlns:a16="http://schemas.microsoft.com/office/drawing/2014/main" id="{61345F4F-7B4D-9BB8-074F-18C8687400E2}"/>
               </a:ext>
             </a:extLst>
           </p:cNvPr>
@@ -5356,7 +5844,7 @@
           <p:nvPr/>
         </p:nvPicPr>
         <p:blipFill>
-          <a:blip r:embed="rId2" cstate="email">
+          <a:blip r:embed="rId7" cstate="email">
             <a:extLst>
               <a:ext uri="{28A0092B-C50C-407E-A947-70E740481C1C}">
                 <a14:useLocalDpi xmlns:a14="http://schemas.microsoft.com/office/drawing/2010/main"/>
@@ -5369,8 +5857,218 @@
         </p:blipFill>
         <p:spPr>
           <a:xfrm>
-            <a:off x="174170" y="680358"/>
-            <a:ext cx="2320472" cy="2131882"/>
+            <a:off x="4818772" y="4386286"/>
+            <a:ext cx="826904" cy="1911240"/>
+          </a:xfrm>
+          <a:prstGeom prst="rect">
+            <a:avLst/>
+          </a:prstGeom>
+        </p:spPr>
+      </p:pic>
+      <p:pic>
+        <p:nvPicPr>
+          <p:cNvPr id="11" name="Picture 10">
+            <a:extLst>
+              <a:ext uri="{FF2B5EF4-FFF2-40B4-BE49-F238E27FC236}">
+                <a16:creationId xmlns:a16="http://schemas.microsoft.com/office/drawing/2014/main" id="{18E4FDCF-3085-EBAE-EB3C-BE36A3B999E1}"/>
+              </a:ext>
+            </a:extLst>
+          </p:cNvPr>
+          <p:cNvPicPr>
+            <a:picLocks noChangeAspect="1"/>
+          </p:cNvPicPr>
+          <p:nvPr/>
+        </p:nvPicPr>
+        <p:blipFill>
+          <a:blip r:embed="rId8" cstate="email">
+            <a:extLst>
+              <a:ext uri="{28A0092B-C50C-407E-A947-70E740481C1C}">
+                <a14:useLocalDpi xmlns:a14="http://schemas.microsoft.com/office/drawing/2010/main"/>
+              </a:ext>
+            </a:extLst>
+          </a:blip>
+          <a:stretch>
+            <a:fillRect/>
+          </a:stretch>
+        </p:blipFill>
+        <p:spPr>
+          <a:xfrm>
+            <a:off x="4448753" y="507150"/>
+            <a:ext cx="1120978" cy="1009387"/>
+          </a:xfrm>
+          <a:prstGeom prst="rect">
+            <a:avLst/>
+          </a:prstGeom>
+        </p:spPr>
+      </p:pic>
+      <p:sp>
+        <p:nvSpPr>
+          <p:cNvPr id="12" name="TextBox 11">
+            <a:extLst>
+              <a:ext uri="{FF2B5EF4-FFF2-40B4-BE49-F238E27FC236}">
+                <a16:creationId xmlns:a16="http://schemas.microsoft.com/office/drawing/2014/main" id="{AE49BAA3-8514-85D4-BA93-81C278A793C0}"/>
+              </a:ext>
+            </a:extLst>
+          </p:cNvPr>
+          <p:cNvSpPr txBox="1"/>
+          <p:nvPr/>
+        </p:nvSpPr>
+        <p:spPr>
+          <a:xfrm>
+            <a:off x="4508117" y="1590610"/>
+            <a:ext cx="1002249" cy="738664"/>
+          </a:xfrm>
+          <a:prstGeom prst="rect">
+            <a:avLst/>
+          </a:prstGeom>
+          <a:solidFill>
+            <a:schemeClr val="accent4">
+              <a:lumMod val="20000"/>
+              <a:lumOff val="80000"/>
+            </a:schemeClr>
+          </a:solidFill>
+          <a:ln>
+            <a:solidFill>
+              <a:srgbClr val="FF0000"/>
+            </a:solidFill>
+          </a:ln>
+        </p:spPr>
+        <p:txBody>
+          <a:bodyPr wrap="square" rtlCol="0">
+            <a:spAutoFit/>
+          </a:bodyPr>
+          <a:lstStyle/>
+          <a:p>
+            <a:pPr algn="ctr"/>
+            <a:r>
+              <a:rPr lang="en-US" sz="1400" b="0" i="0" dirty="0">
+                <a:solidFill>
+                  <a:srgbClr val="222222"/>
+                </a:solidFill>
+                <a:effectLst/>
+                <a:latin typeface="Source Sans Pro" panose="020B0503030403020204" pitchFamily="34" charset="0"/>
+              </a:rPr>
+              <a:t>TR</a:t>
+            </a:r>
+          </a:p>
+          <a:p>
+            <a:pPr algn="ctr"/>
+            <a:r>
+              <a:rPr lang="en-US" sz="1400" b="0" i="0" dirty="0">
+                <a:solidFill>
+                  <a:srgbClr val="232629"/>
+                </a:solidFill>
+                <a:effectLst/>
+                <a:latin typeface="-apple-system"/>
+              </a:rPr>
+              <a:t>Tamper-Resistant </a:t>
+            </a:r>
+            <a:endParaRPr lang="en-US" sz="1400" b="0" i="0" dirty="0">
+              <a:solidFill>
+                <a:srgbClr val="222222"/>
+              </a:solidFill>
+              <a:effectLst/>
+              <a:latin typeface="Source Sans Pro" panose="020B0503030403020204" pitchFamily="34" charset="0"/>
+            </a:endParaRPr>
+          </a:p>
+        </p:txBody>
+      </p:sp>
+      <p:pic>
+        <p:nvPicPr>
+          <p:cNvPr id="13" name="Picture 12" descr="A diagram of a wire with text&#10;&#10;Description automatically generated with medium confidence">
+            <a:extLst>
+              <a:ext uri="{FF2B5EF4-FFF2-40B4-BE49-F238E27FC236}">
+                <a16:creationId xmlns:a16="http://schemas.microsoft.com/office/drawing/2014/main" id="{B040E235-3EEE-7B3B-54D9-E8596E86E309}"/>
+              </a:ext>
+            </a:extLst>
+          </p:cNvPr>
+          <p:cNvPicPr>
+            <a:picLocks noChangeAspect="1"/>
+          </p:cNvPicPr>
+          <p:nvPr/>
+        </p:nvPicPr>
+        <p:blipFill>
+          <a:blip r:embed="rId9"/>
+          <a:stretch>
+            <a:fillRect/>
+          </a:stretch>
+        </p:blipFill>
+        <p:spPr>
+          <a:xfrm>
+            <a:off x="6411432" y="1304743"/>
+            <a:ext cx="2279431" cy="2199451"/>
+          </a:xfrm>
+          <a:prstGeom prst="rect">
+            <a:avLst/>
+          </a:prstGeom>
+        </p:spPr>
+      </p:pic>
+      <p:pic>
+        <p:nvPicPr>
+          <p:cNvPr id="14" name="Picture 13">
+            <a:extLst>
+              <a:ext uri="{FF2B5EF4-FFF2-40B4-BE49-F238E27FC236}">
+                <a16:creationId xmlns:a16="http://schemas.microsoft.com/office/drawing/2014/main" id="{3EC9E48C-BB97-556B-081C-583E69FB0B7E}"/>
+              </a:ext>
+            </a:extLst>
+          </p:cNvPr>
+          <p:cNvPicPr>
+            <a:picLocks noChangeAspect="1"/>
+          </p:cNvPicPr>
+          <p:nvPr/>
+        </p:nvPicPr>
+        <p:blipFill>
+          <a:blip r:embed="rId10" cstate="email">
+            <a:extLst>
+              <a:ext uri="{28A0092B-C50C-407E-A947-70E740481C1C}">
+                <a14:useLocalDpi xmlns:a14="http://schemas.microsoft.com/office/drawing/2010/main"/>
+              </a:ext>
+            </a:extLst>
+          </a:blip>
+          <a:stretch>
+            <a:fillRect/>
+          </a:stretch>
+        </p:blipFill>
+        <p:spPr>
+          <a:xfrm>
+            <a:off x="9416413" y="1465546"/>
+            <a:ext cx="1556387" cy="2038648"/>
+          </a:xfrm>
+          <a:prstGeom prst="rect">
+            <a:avLst/>
+          </a:prstGeom>
+        </p:spPr>
+      </p:pic>
+      <p:pic>
+        <p:nvPicPr>
+          <p:cNvPr id="15" name="Picture 14">
+            <a:extLst>
+              <a:ext uri="{FF2B5EF4-FFF2-40B4-BE49-F238E27FC236}">
+                <a16:creationId xmlns:a16="http://schemas.microsoft.com/office/drawing/2014/main" id="{F4D270D6-F503-7D80-FB96-1D21F6D9B7BD}"/>
+              </a:ext>
+            </a:extLst>
+          </p:cNvPr>
+          <p:cNvPicPr>
+            <a:picLocks noChangeAspect="1"/>
+          </p:cNvPicPr>
+          <p:nvPr/>
+        </p:nvPicPr>
+        <p:blipFill>
+          <a:blip r:embed="rId11" cstate="email">
+            <a:extLst>
+              <a:ext uri="{28A0092B-C50C-407E-A947-70E740481C1C}">
+                <a14:useLocalDpi xmlns:a14="http://schemas.microsoft.com/office/drawing/2010/main"/>
+              </a:ext>
+            </a:extLst>
+          </a:blip>
+          <a:stretch>
+            <a:fillRect/>
+          </a:stretch>
+        </p:blipFill>
+        <p:spPr>
+          <a:xfrm>
+            <a:off x="1855103" y="1729304"/>
+            <a:ext cx="2071963" cy="2593575"/>
           </a:xfrm>
           <a:prstGeom prst="rect">
             <a:avLst/>
@@ -5380,7 +6078,7 @@
     </p:spTree>
     <p:extLst>
       <p:ext uri="{BB962C8B-B14F-4D97-AF65-F5344CB8AC3E}">
-        <p14:creationId xmlns:p14="http://schemas.microsoft.com/office/powerpoint/2010/main" val="244353106"/>
+        <p14:creationId xmlns:p14="http://schemas.microsoft.com/office/powerpoint/2010/main" val="3495273034"/>
       </p:ext>
     </p:extLst>
   </p:cSld>
@@ -5409,10 +6107,10 @@
       </p:grpSpPr>
       <p:sp>
         <p:nvSpPr>
-          <p:cNvPr id="2" name="TextBox 1">
-            <a:extLst>
-              <a:ext uri="{FF2B5EF4-FFF2-40B4-BE49-F238E27FC236}">
-                <a16:creationId xmlns:a16="http://schemas.microsoft.com/office/drawing/2014/main" id="{EE36FE47-BB4C-FCF2-33ED-2A30345CD962}"/>
+          <p:cNvPr id="5" name="TextBox 4">
+            <a:extLst>
+              <a:ext uri="{FF2B5EF4-FFF2-40B4-BE49-F238E27FC236}">
+                <a16:creationId xmlns:a16="http://schemas.microsoft.com/office/drawing/2014/main" id="{00F7C244-2B21-9F46-FFD4-C3E1F30429F1}"/>
               </a:ext>
             </a:extLst>
           </p:cNvPr>
@@ -5421,8 +6119,251 @@
         </p:nvSpPr>
         <p:spPr>
           <a:xfrm>
-            <a:off x="0" y="15037"/>
-            <a:ext cx="1965434" cy="369332"/>
+            <a:off x="174170" y="3069099"/>
+            <a:ext cx="5203371" cy="3108543"/>
+          </a:xfrm>
+          <a:prstGeom prst="rect">
+            <a:avLst/>
+          </a:prstGeom>
+          <a:solidFill>
+            <a:schemeClr val="accent4">
+              <a:lumMod val="20000"/>
+              <a:lumOff val="80000"/>
+            </a:schemeClr>
+          </a:solidFill>
+          <a:ln>
+            <a:solidFill>
+              <a:srgbClr val="FF0000"/>
+            </a:solidFill>
+          </a:ln>
+        </p:spPr>
+        <p:txBody>
+          <a:bodyPr wrap="square" rtlCol="0">
+            <a:spAutoFit/>
+          </a:bodyPr>
+          <a:lstStyle/>
+          <a:p>
+            <a:r>
+              <a:rPr lang="en-US" sz="1400" b="0" i="0" dirty="0">
+                <a:solidFill>
+                  <a:srgbClr val="232629"/>
+                </a:solidFill>
+                <a:effectLst/>
+                <a:latin typeface="Calibri" panose="020F0502020204030204" pitchFamily="34" charset="0"/>
+                <a:cs typeface="Calibri" panose="020F0502020204030204" pitchFamily="34" charset="0"/>
+              </a:rPr>
+              <a:t>Push-in wiring, sometimes branded "</a:t>
+            </a:r>
+            <a:r>
+              <a:rPr lang="en-US" sz="1400" b="1" i="0" dirty="0" err="1">
+                <a:solidFill>
+                  <a:srgbClr val="00B050"/>
+                </a:solidFill>
+                <a:effectLst/>
+                <a:latin typeface="Calibri" panose="020F0502020204030204" pitchFamily="34" charset="0"/>
+                <a:cs typeface="Calibri" panose="020F0502020204030204" pitchFamily="34" charset="0"/>
+              </a:rPr>
+              <a:t>QuickWire</a:t>
+            </a:r>
+            <a:r>
+              <a:rPr lang="en-US" sz="1400" b="0" i="0" dirty="0">
+                <a:solidFill>
+                  <a:srgbClr val="232629"/>
+                </a:solidFill>
+                <a:effectLst/>
+                <a:latin typeface="Calibri" panose="020F0502020204030204" pitchFamily="34" charset="0"/>
+                <a:cs typeface="Calibri" panose="020F0502020204030204" pitchFamily="34" charset="0"/>
+              </a:rPr>
+              <a:t>", uses holes in the plastic casing, underneath which are sharp spring-loaded cleats that catch and hold the wire when you put it in. It compresses on the wire more when </a:t>
+            </a:r>
+            <a:r>
+              <a:rPr lang="en-US" sz="1400" dirty="0">
+                <a:latin typeface="Calibri" panose="020F0502020204030204" pitchFamily="34" charset="0"/>
+                <a:cs typeface="Calibri" panose="020F0502020204030204" pitchFamily="34" charset="0"/>
+              </a:rPr>
+              <a:t>the side screw is tightened. </a:t>
+            </a:r>
+          </a:p>
+          <a:p>
+            <a:endParaRPr lang="en-US" sz="1400" dirty="0">
+              <a:latin typeface="Calibri" panose="020F0502020204030204" pitchFamily="34" charset="0"/>
+              <a:cs typeface="Calibri" panose="020F0502020204030204" pitchFamily="34" charset="0"/>
+            </a:endParaRPr>
+          </a:p>
+          <a:p>
+            <a:r>
+              <a:rPr lang="en-US" sz="1400" dirty="0">
+                <a:latin typeface="Calibri" panose="020F0502020204030204" pitchFamily="34" charset="0"/>
+                <a:cs typeface="Calibri" panose="020F0502020204030204" pitchFamily="34" charset="0"/>
+              </a:rPr>
+              <a:t>Most electrician I know uses the back connections on GFI's and side wires regular receptacles. </a:t>
+            </a:r>
+          </a:p>
+          <a:p>
+            <a:endParaRPr lang="en-US" sz="1400" dirty="0">
+              <a:latin typeface="Calibri" panose="020F0502020204030204" pitchFamily="34" charset="0"/>
+              <a:cs typeface="Calibri" panose="020F0502020204030204" pitchFamily="34" charset="0"/>
+            </a:endParaRPr>
+          </a:p>
+          <a:p>
+            <a:r>
+              <a:rPr lang="en-US" sz="1400" dirty="0">
+                <a:latin typeface="Calibri" panose="020F0502020204030204" pitchFamily="34" charset="0"/>
+                <a:cs typeface="Calibri" panose="020F0502020204030204" pitchFamily="34" charset="0"/>
+              </a:rPr>
+              <a:t>When inserting the wire, release the screw and tip the device so the grab plates would open. </a:t>
+            </a:r>
+          </a:p>
+          <a:p>
+            <a:endParaRPr lang="en-US" sz="1400" dirty="0">
+              <a:latin typeface="Calibri" panose="020F0502020204030204" pitchFamily="34" charset="0"/>
+              <a:cs typeface="Calibri" panose="020F0502020204030204" pitchFamily="34" charset="0"/>
+            </a:endParaRPr>
+          </a:p>
+          <a:p>
+            <a:r>
+              <a:rPr lang="en-US" sz="1400" b="0" i="0" dirty="0">
+                <a:solidFill>
+                  <a:srgbClr val="232629"/>
+                </a:solidFill>
+                <a:effectLst/>
+                <a:latin typeface="Calibri" panose="020F0502020204030204" pitchFamily="34" charset="0"/>
+                <a:cs typeface="Calibri" panose="020F0502020204030204" pitchFamily="34" charset="0"/>
+              </a:rPr>
+              <a:t>To remove them, you take a jeweler's screwdriver or a small pick or probe and push into a square tab nearby, which pushes the cleat away allowing you to withdraw the wire. </a:t>
+            </a:r>
+          </a:p>
+        </p:txBody>
+      </p:sp>
+      <p:sp>
+        <p:nvSpPr>
+          <p:cNvPr id="6" name="TextBox 5">
+            <a:extLst>
+              <a:ext uri="{FF2B5EF4-FFF2-40B4-BE49-F238E27FC236}">
+                <a16:creationId xmlns:a16="http://schemas.microsoft.com/office/drawing/2014/main" id="{F175C12B-403E-7DA9-E744-63A5BF8FBC8C}"/>
+              </a:ext>
+            </a:extLst>
+          </p:cNvPr>
+          <p:cNvSpPr txBox="1"/>
+          <p:nvPr/>
+        </p:nvSpPr>
+        <p:spPr>
+          <a:xfrm>
+            <a:off x="5519058" y="3077097"/>
+            <a:ext cx="6400801" cy="1600438"/>
+          </a:xfrm>
+          <a:prstGeom prst="rect">
+            <a:avLst/>
+          </a:prstGeom>
+          <a:solidFill>
+            <a:schemeClr val="accent4">
+              <a:lumMod val="20000"/>
+              <a:lumOff val="80000"/>
+            </a:schemeClr>
+          </a:solidFill>
+          <a:ln>
+            <a:solidFill>
+              <a:srgbClr val="FF0000"/>
+            </a:solidFill>
+          </a:ln>
+        </p:spPr>
+        <p:txBody>
+          <a:bodyPr wrap="square" rtlCol="0">
+            <a:spAutoFit/>
+          </a:bodyPr>
+          <a:lstStyle/>
+          <a:p>
+            <a:pPr algn="l" fontAlgn="base"/>
+            <a:r>
+              <a:rPr lang="en-US" sz="1400" b="0" i="0" dirty="0">
+                <a:solidFill>
+                  <a:srgbClr val="232629"/>
+                </a:solidFill>
+                <a:effectLst/>
+                <a:latin typeface="Calibri" panose="020F0502020204030204" pitchFamily="34" charset="0"/>
+                <a:cs typeface="Calibri" panose="020F0502020204030204" pitchFamily="34" charset="0"/>
+              </a:rPr>
+              <a:t>Many people hate "push-in"</a:t>
+            </a:r>
+            <a:r>
+              <a:rPr lang="en-US" sz="1400" dirty="0">
+                <a:solidFill>
+                  <a:srgbClr val="232629"/>
+                </a:solidFill>
+                <a:latin typeface="Calibri" panose="020F0502020204030204" pitchFamily="34" charset="0"/>
+                <a:cs typeface="Calibri" panose="020F0502020204030204" pitchFamily="34" charset="0"/>
+              </a:rPr>
+              <a:t> because:</a:t>
+            </a:r>
+          </a:p>
+          <a:p>
+            <a:pPr algn="l" fontAlgn="base"/>
+            <a:r>
+              <a:rPr lang="en-US" sz="1400" b="0" i="0" dirty="0">
+                <a:solidFill>
+                  <a:srgbClr val="232629"/>
+                </a:solidFill>
+                <a:effectLst/>
+                <a:latin typeface="Calibri" panose="020F0502020204030204" pitchFamily="34" charset="0"/>
+                <a:cs typeface="Calibri" panose="020F0502020204030204" pitchFamily="34" charset="0"/>
+              </a:rPr>
+              <a:t> .. they are designed to work only with one gauge of wire (either 12 or 14AWG depending on the type of switch or outlet). </a:t>
+            </a:r>
+          </a:p>
+          <a:p>
+            <a:pPr algn="l" fontAlgn="base"/>
+            <a:r>
+              <a:rPr lang="en-US" sz="1400" dirty="0">
+                <a:solidFill>
+                  <a:srgbClr val="232629"/>
+                </a:solidFill>
+                <a:latin typeface="Calibri" panose="020F0502020204030204" pitchFamily="34" charset="0"/>
+                <a:cs typeface="Calibri" panose="020F0502020204030204" pitchFamily="34" charset="0"/>
+              </a:rPr>
+              <a:t> .. getting the wire out of the hole without damaging it is difficult</a:t>
+            </a:r>
+          </a:p>
+          <a:p>
+            <a:pPr algn="l" fontAlgn="base"/>
+            <a:endParaRPr lang="en-US" sz="1400" dirty="0">
+              <a:solidFill>
+                <a:srgbClr val="232629"/>
+              </a:solidFill>
+              <a:latin typeface="Calibri" panose="020F0502020204030204" pitchFamily="34" charset="0"/>
+              <a:cs typeface="Calibri" panose="020F0502020204030204" pitchFamily="34" charset="0"/>
+            </a:endParaRPr>
+          </a:p>
+          <a:p>
+            <a:pPr algn="l" fontAlgn="base"/>
+            <a:r>
+              <a:rPr lang="en-US" sz="1400" dirty="0">
+                <a:solidFill>
+                  <a:srgbClr val="232629"/>
+                </a:solidFill>
+                <a:latin typeface="Calibri" panose="020F0502020204030204" pitchFamily="34" charset="0"/>
+                <a:cs typeface="Calibri" panose="020F0502020204030204" pitchFamily="34" charset="0"/>
+              </a:rPr>
+              <a:t>It is safer to use the side-clamping. Make sure to add isolation tape to prevent shorting on metal parts of bare ground.</a:t>
+            </a:r>
+          </a:p>
+        </p:txBody>
+      </p:sp>
+      <p:sp>
+        <p:nvSpPr>
+          <p:cNvPr id="7" name="TextBox 6">
+            <a:extLst>
+              <a:ext uri="{FF2B5EF4-FFF2-40B4-BE49-F238E27FC236}">
+                <a16:creationId xmlns:a16="http://schemas.microsoft.com/office/drawing/2014/main" id="{E39A6CAE-EAAF-6008-F358-9E14866A0059}"/>
+              </a:ext>
+            </a:extLst>
+          </p:cNvPr>
+          <p:cNvSpPr txBox="1"/>
+          <p:nvPr/>
+        </p:nvSpPr>
+        <p:spPr>
+          <a:xfrm>
+            <a:off x="-19959" y="0"/>
+            <a:ext cx="5029201" cy="523220"/>
           </a:xfrm>
           <a:prstGeom prst="rect">
             <a:avLst/>
@@ -5436,59 +6377,42 @@
           <a:lstStyle/>
           <a:p>
             <a:r>
-              <a:rPr lang="en-US" b="1" dirty="0"/>
-              <a:t>Electrical Breaker</a:t>
-            </a:r>
-          </a:p>
-        </p:txBody>
-      </p:sp>
-      <p:sp>
-        <p:nvSpPr>
-          <p:cNvPr id="3" name="TextBox 2">
-            <a:extLst>
-              <a:ext uri="{FF2B5EF4-FFF2-40B4-BE49-F238E27FC236}">
-                <a16:creationId xmlns:a16="http://schemas.microsoft.com/office/drawing/2014/main" id="{ED9793CB-50FF-ABA2-02A3-D95B14ECE23D}"/>
-              </a:ext>
-            </a:extLst>
-          </p:cNvPr>
-          <p:cNvSpPr txBox="1"/>
-          <p:nvPr/>
-        </p:nvSpPr>
-        <p:spPr>
-          <a:xfrm>
-            <a:off x="8679357" y="5002700"/>
-            <a:ext cx="3083692" cy="923330"/>
-          </a:xfrm>
-          <a:prstGeom prst="rect">
-            <a:avLst/>
-          </a:prstGeom>
-          <a:noFill/>
-        </p:spPr>
-        <p:txBody>
-          <a:bodyPr wrap="square" rtlCol="0">
-            <a:spAutoFit/>
-          </a:bodyPr>
-          <a:lstStyle/>
-          <a:p>
-            <a:r>
-              <a:rPr lang="en-US" dirty="0"/>
-              <a:t>We need 50A 2-pole breaker</a:t>
-            </a:r>
-          </a:p>
-          <a:p>
-            <a:r>
-              <a:rPr lang="en-US" dirty="0"/>
-              <a:t>The Panel is compatible with Cutler Hammer standard</a:t>
-            </a:r>
+              <a:rPr lang="en-US" sz="2800" b="1" i="0" dirty="0">
+                <a:solidFill>
+                  <a:srgbClr val="232629"/>
+                </a:solidFill>
+                <a:effectLst/>
+              </a:rPr>
+              <a:t>"Push-in" </a:t>
+            </a:r>
+            <a:r>
+              <a:rPr lang="en-US" sz="2800" b="1" i="0" dirty="0" err="1">
+                <a:solidFill>
+                  <a:srgbClr val="232629"/>
+                </a:solidFill>
+                <a:effectLst/>
+              </a:rPr>
+              <a:t>QuickWire</a:t>
+            </a:r>
+            <a:r>
+              <a:rPr lang="en-US" sz="2800" b="1" i="0" dirty="0">
+                <a:solidFill>
+                  <a:srgbClr val="232629"/>
+                </a:solidFill>
+                <a:effectLst/>
+              </a:rPr>
+              <a:t> terminals</a:t>
+            </a:r>
+            <a:endParaRPr lang="en-US" sz="2800" b="1" dirty="0"/>
           </a:p>
         </p:txBody>
       </p:sp>
       <p:pic>
         <p:nvPicPr>
-          <p:cNvPr id="4" name="Picture 3">
-            <a:extLst>
-              <a:ext uri="{FF2B5EF4-FFF2-40B4-BE49-F238E27FC236}">
-                <a16:creationId xmlns:a16="http://schemas.microsoft.com/office/drawing/2014/main" id="{AB5D2391-A8A3-24F4-696B-8A74248D4A0F}"/>
+          <p:cNvPr id="8" name="Picture 7">
+            <a:extLst>
+              <a:ext uri="{FF2B5EF4-FFF2-40B4-BE49-F238E27FC236}">
+                <a16:creationId xmlns:a16="http://schemas.microsoft.com/office/drawing/2014/main" id="{B9C42EFB-0833-F87B-7B76-A38CD6C296C7}"/>
               </a:ext>
             </a:extLst>
           </p:cNvPr>
@@ -5511,259 +6435,18 @@
         </p:blipFill>
         <p:spPr>
           <a:xfrm>
-            <a:off x="91091" y="1737936"/>
-            <a:ext cx="3083035" cy="3162378"/>
+            <a:off x="174170" y="680358"/>
+            <a:ext cx="2320472" cy="2131882"/>
           </a:xfrm>
           <a:prstGeom prst="rect">
             <a:avLst/>
           </a:prstGeom>
         </p:spPr>
       </p:pic>
-      <p:pic>
-        <p:nvPicPr>
-          <p:cNvPr id="5" name="Picture 4">
-            <a:extLst>
-              <a:ext uri="{FF2B5EF4-FFF2-40B4-BE49-F238E27FC236}">
-                <a16:creationId xmlns:a16="http://schemas.microsoft.com/office/drawing/2014/main" id="{9EDFB735-D6A7-67F0-6924-8A25EC0637DD}"/>
-              </a:ext>
-            </a:extLst>
-          </p:cNvPr>
-          <p:cNvPicPr>
-            <a:picLocks noChangeAspect="1"/>
-          </p:cNvPicPr>
-          <p:nvPr/>
-        </p:nvPicPr>
-        <p:blipFill>
-          <a:blip r:embed="rId3" cstate="email">
-            <a:extLst>
-              <a:ext uri="{28A0092B-C50C-407E-A947-70E740481C1C}">
-                <a14:useLocalDpi xmlns:a14="http://schemas.microsoft.com/office/drawing/2010/main"/>
-              </a:ext>
-            </a:extLst>
-          </a:blip>
-          <a:stretch>
-            <a:fillRect/>
-          </a:stretch>
-        </p:blipFill>
-        <p:spPr>
-          <a:xfrm rot="16200000">
-            <a:off x="719379" y="4314038"/>
-            <a:ext cx="1847357" cy="3103935"/>
-          </a:xfrm>
-          <a:prstGeom prst="rect">
-            <a:avLst/>
-          </a:prstGeom>
-        </p:spPr>
-      </p:pic>
-      <p:pic>
-        <p:nvPicPr>
-          <p:cNvPr id="6" name="Picture 5">
-            <a:extLst>
-              <a:ext uri="{FF2B5EF4-FFF2-40B4-BE49-F238E27FC236}">
-                <a16:creationId xmlns:a16="http://schemas.microsoft.com/office/drawing/2014/main" id="{1451E093-C62A-6F22-068D-C20B42191100}"/>
-              </a:ext>
-            </a:extLst>
-          </p:cNvPr>
-          <p:cNvPicPr>
-            <a:picLocks noChangeAspect="1"/>
-          </p:cNvPicPr>
-          <p:nvPr/>
-        </p:nvPicPr>
-        <p:blipFill>
-          <a:blip r:embed="rId4" cstate="email">
-            <a:extLst>
-              <a:ext uri="{28A0092B-C50C-407E-A947-70E740481C1C}">
-                <a14:useLocalDpi xmlns:a14="http://schemas.microsoft.com/office/drawing/2010/main"/>
-              </a:ext>
-            </a:extLst>
-          </a:blip>
-          <a:stretch>
-            <a:fillRect/>
-          </a:stretch>
-        </p:blipFill>
-        <p:spPr>
-          <a:xfrm>
-            <a:off x="3268717" y="3564674"/>
-            <a:ext cx="1902591" cy="3196739"/>
-          </a:xfrm>
-          <a:prstGeom prst="rect">
-            <a:avLst/>
-          </a:prstGeom>
-        </p:spPr>
-      </p:pic>
-      <p:pic>
-        <p:nvPicPr>
-          <p:cNvPr id="7" name="Picture 6">
-            <a:extLst>
-              <a:ext uri="{FF2B5EF4-FFF2-40B4-BE49-F238E27FC236}">
-                <a16:creationId xmlns:a16="http://schemas.microsoft.com/office/drawing/2014/main" id="{EF00A280-0C58-48C6-6374-6950E70484B4}"/>
-              </a:ext>
-            </a:extLst>
-          </p:cNvPr>
-          <p:cNvPicPr>
-            <a:picLocks noChangeAspect="1"/>
-          </p:cNvPicPr>
-          <p:nvPr/>
-        </p:nvPicPr>
-        <p:blipFill>
-          <a:blip r:embed="rId5" cstate="email">
-            <a:extLst>
-              <a:ext uri="{28A0092B-C50C-407E-A947-70E740481C1C}">
-                <a14:useLocalDpi xmlns:a14="http://schemas.microsoft.com/office/drawing/2010/main"/>
-              </a:ext>
-            </a:extLst>
-          </a:blip>
-          <a:stretch>
-            <a:fillRect/>
-          </a:stretch>
-        </p:blipFill>
-        <p:spPr>
-          <a:xfrm>
-            <a:off x="5318574" y="3564674"/>
-            <a:ext cx="1902591" cy="3196739"/>
-          </a:xfrm>
-          <a:prstGeom prst="rect">
-            <a:avLst/>
-          </a:prstGeom>
-        </p:spPr>
-      </p:pic>
-      <p:sp>
-        <p:nvSpPr>
-          <p:cNvPr id="8" name="TextBox 7">
-            <a:extLst>
-              <a:ext uri="{FF2B5EF4-FFF2-40B4-BE49-F238E27FC236}">
-                <a16:creationId xmlns:a16="http://schemas.microsoft.com/office/drawing/2014/main" id="{9A76ECB1-CBC6-46CA-370A-54A0F010E3EC}"/>
-              </a:ext>
-            </a:extLst>
-          </p:cNvPr>
-          <p:cNvSpPr txBox="1"/>
-          <p:nvPr/>
-        </p:nvSpPr>
-        <p:spPr>
-          <a:xfrm>
-            <a:off x="8145517" y="158840"/>
-            <a:ext cx="3920359" cy="1384995"/>
-          </a:xfrm>
-          <a:prstGeom prst="rect">
-            <a:avLst/>
-          </a:prstGeom>
-          <a:noFill/>
-        </p:spPr>
-        <p:txBody>
-          <a:bodyPr wrap="square" rtlCol="0">
-            <a:spAutoFit/>
-          </a:bodyPr>
-          <a:lstStyle/>
-          <a:p>
-            <a:r>
-              <a:rPr lang="en-US" sz="1400"/>
-              <a:t>August 2022 – bought on amazon:</a:t>
-            </a:r>
-          </a:p>
-          <a:p>
-            <a:endParaRPr lang="en-US" sz="1400"/>
-          </a:p>
-          <a:p>
-            <a:r>
-              <a:rPr lang="en-US" sz="1400"/>
-              <a:t>CH250 2-Pole 50-Amp Circuit Breaker, Type CH 3/4-Inch Plug-On Molded Case Circuit Breaker, Thermal Magnetic Protection, 10 KAIC, 120/240V, Fit for Cutler Hammer Load Centers (3 Years Warranty)</a:t>
-            </a:r>
-          </a:p>
-        </p:txBody>
-      </p:sp>
-      <p:pic>
-        <p:nvPicPr>
-          <p:cNvPr id="9" name="Picture 8">
-            <a:extLst>
-              <a:ext uri="{FF2B5EF4-FFF2-40B4-BE49-F238E27FC236}">
-                <a16:creationId xmlns:a16="http://schemas.microsoft.com/office/drawing/2014/main" id="{822E6762-F007-05A8-1499-16EDCBCDF195}"/>
-              </a:ext>
-            </a:extLst>
-          </p:cNvPr>
-          <p:cNvPicPr>
-            <a:picLocks noChangeAspect="1"/>
-          </p:cNvPicPr>
-          <p:nvPr/>
-        </p:nvPicPr>
-        <p:blipFill>
-          <a:blip r:embed="rId6" cstate="email">
-            <a:extLst>
-              <a:ext uri="{28A0092B-C50C-407E-A947-70E740481C1C}">
-                <a14:useLocalDpi xmlns:a14="http://schemas.microsoft.com/office/drawing/2010/main"/>
-              </a:ext>
-            </a:extLst>
-          </a:blip>
-          <a:stretch>
-            <a:fillRect/>
-          </a:stretch>
-        </p:blipFill>
-        <p:spPr>
-          <a:xfrm>
-            <a:off x="8679357" y="1543835"/>
-            <a:ext cx="2755900" cy="2997200"/>
-          </a:xfrm>
-          <a:prstGeom prst="rect">
-            <a:avLst/>
-          </a:prstGeom>
-        </p:spPr>
-      </p:pic>
-      <p:sp>
-        <p:nvSpPr>
-          <p:cNvPr id="10" name="TextBox 9">
-            <a:extLst>
-              <a:ext uri="{FF2B5EF4-FFF2-40B4-BE49-F238E27FC236}">
-                <a16:creationId xmlns:a16="http://schemas.microsoft.com/office/drawing/2014/main" id="{B1CA3A46-1658-9084-396B-2BC71E318A7F}"/>
-              </a:ext>
-            </a:extLst>
-          </p:cNvPr>
-          <p:cNvSpPr txBox="1"/>
-          <p:nvPr/>
-        </p:nvSpPr>
-        <p:spPr>
-          <a:xfrm>
-            <a:off x="252249" y="830320"/>
-            <a:ext cx="6379779" cy="461665"/>
-          </a:xfrm>
-          <a:prstGeom prst="rect">
-            <a:avLst/>
-          </a:prstGeom>
-          <a:noFill/>
-        </p:spPr>
-        <p:txBody>
-          <a:bodyPr wrap="square" rtlCol="0">
-            <a:spAutoFit/>
-          </a:bodyPr>
-          <a:lstStyle/>
-          <a:p>
-            <a:r>
-              <a:rPr lang="en-US" sz="1200" b="0" i="0" dirty="0">
-                <a:solidFill>
-                  <a:srgbClr val="333333"/>
-                </a:solidFill>
-                <a:effectLst/>
-                <a:latin typeface="helvetica-neue"/>
-              </a:rPr>
-              <a:t>Types of Circuit Breakers</a:t>
-            </a:r>
-            <a:endParaRPr lang="en-US" sz="1200" dirty="0">
-              <a:hlinkClick r:id="rId7"/>
-            </a:endParaRPr>
-          </a:p>
-          <a:p>
-            <a:r>
-              <a:rPr lang="en-US" sz="1200" dirty="0">
-                <a:hlinkClick r:id="rId7"/>
-              </a:rPr>
-              <a:t>https://www.homedepot.com/c/ab/types-of-circuit-breakers/9ba683603be9fa5395fab900f0d22b4</a:t>
-            </a:r>
-            <a:endParaRPr lang="en-US" sz="1200" dirty="0"/>
-          </a:p>
-        </p:txBody>
-      </p:sp>
     </p:spTree>
     <p:extLst>
       <p:ext uri="{BB962C8B-B14F-4D97-AF65-F5344CB8AC3E}">
-        <p14:creationId xmlns:p14="http://schemas.microsoft.com/office/powerpoint/2010/main" val="2674537515"/>
+        <p14:creationId xmlns:p14="http://schemas.microsoft.com/office/powerpoint/2010/main" val="244353106"/>
       </p:ext>
     </p:extLst>
   </p:cSld>
@@ -5804,6 +6487,389 @@
         </p:nvSpPr>
         <p:spPr>
           <a:xfrm>
+            <a:off x="0" y="15037"/>
+            <a:ext cx="1965434" cy="369332"/>
+          </a:xfrm>
+          <a:prstGeom prst="rect">
+            <a:avLst/>
+          </a:prstGeom>
+          <a:noFill/>
+        </p:spPr>
+        <p:txBody>
+          <a:bodyPr wrap="square" rtlCol="0">
+            <a:spAutoFit/>
+          </a:bodyPr>
+          <a:lstStyle/>
+          <a:p>
+            <a:r>
+              <a:rPr lang="en-US" b="1" dirty="0"/>
+              <a:t>Electrical Breaker</a:t>
+            </a:r>
+          </a:p>
+        </p:txBody>
+      </p:sp>
+      <p:sp>
+        <p:nvSpPr>
+          <p:cNvPr id="3" name="TextBox 2">
+            <a:extLst>
+              <a:ext uri="{FF2B5EF4-FFF2-40B4-BE49-F238E27FC236}">
+                <a16:creationId xmlns:a16="http://schemas.microsoft.com/office/drawing/2014/main" id="{ED9793CB-50FF-ABA2-02A3-D95B14ECE23D}"/>
+              </a:ext>
+            </a:extLst>
+          </p:cNvPr>
+          <p:cNvSpPr txBox="1"/>
+          <p:nvPr/>
+        </p:nvSpPr>
+        <p:spPr>
+          <a:xfrm>
+            <a:off x="8679357" y="5002700"/>
+            <a:ext cx="3083692" cy="923330"/>
+          </a:xfrm>
+          <a:prstGeom prst="rect">
+            <a:avLst/>
+          </a:prstGeom>
+          <a:noFill/>
+        </p:spPr>
+        <p:txBody>
+          <a:bodyPr wrap="square" rtlCol="0">
+            <a:spAutoFit/>
+          </a:bodyPr>
+          <a:lstStyle/>
+          <a:p>
+            <a:r>
+              <a:rPr lang="en-US" dirty="0"/>
+              <a:t>We need 50A 2-pole breaker</a:t>
+            </a:r>
+          </a:p>
+          <a:p>
+            <a:r>
+              <a:rPr lang="en-US" dirty="0"/>
+              <a:t>The Panel is compatible with Cutler Hammer standard</a:t>
+            </a:r>
+          </a:p>
+        </p:txBody>
+      </p:sp>
+      <p:pic>
+        <p:nvPicPr>
+          <p:cNvPr id="4" name="Picture 3">
+            <a:extLst>
+              <a:ext uri="{FF2B5EF4-FFF2-40B4-BE49-F238E27FC236}">
+                <a16:creationId xmlns:a16="http://schemas.microsoft.com/office/drawing/2014/main" id="{AB5D2391-A8A3-24F4-696B-8A74248D4A0F}"/>
+              </a:ext>
+            </a:extLst>
+          </p:cNvPr>
+          <p:cNvPicPr>
+            <a:picLocks noChangeAspect="1"/>
+          </p:cNvPicPr>
+          <p:nvPr/>
+        </p:nvPicPr>
+        <p:blipFill>
+          <a:blip r:embed="rId2" cstate="email">
+            <a:extLst>
+              <a:ext uri="{28A0092B-C50C-407E-A947-70E740481C1C}">
+                <a14:useLocalDpi xmlns:a14="http://schemas.microsoft.com/office/drawing/2010/main"/>
+              </a:ext>
+            </a:extLst>
+          </a:blip>
+          <a:stretch>
+            <a:fillRect/>
+          </a:stretch>
+        </p:blipFill>
+        <p:spPr>
+          <a:xfrm>
+            <a:off x="91091" y="1737936"/>
+            <a:ext cx="3083035" cy="3162378"/>
+          </a:xfrm>
+          <a:prstGeom prst="rect">
+            <a:avLst/>
+          </a:prstGeom>
+        </p:spPr>
+      </p:pic>
+      <p:pic>
+        <p:nvPicPr>
+          <p:cNvPr id="5" name="Picture 4">
+            <a:extLst>
+              <a:ext uri="{FF2B5EF4-FFF2-40B4-BE49-F238E27FC236}">
+                <a16:creationId xmlns:a16="http://schemas.microsoft.com/office/drawing/2014/main" id="{9EDFB735-D6A7-67F0-6924-8A25EC0637DD}"/>
+              </a:ext>
+            </a:extLst>
+          </p:cNvPr>
+          <p:cNvPicPr>
+            <a:picLocks noChangeAspect="1"/>
+          </p:cNvPicPr>
+          <p:nvPr/>
+        </p:nvPicPr>
+        <p:blipFill>
+          <a:blip r:embed="rId3" cstate="email">
+            <a:extLst>
+              <a:ext uri="{28A0092B-C50C-407E-A947-70E740481C1C}">
+                <a14:useLocalDpi xmlns:a14="http://schemas.microsoft.com/office/drawing/2010/main"/>
+              </a:ext>
+            </a:extLst>
+          </a:blip>
+          <a:stretch>
+            <a:fillRect/>
+          </a:stretch>
+        </p:blipFill>
+        <p:spPr>
+          <a:xfrm rot="16200000">
+            <a:off x="719379" y="4314038"/>
+            <a:ext cx="1847357" cy="3103935"/>
+          </a:xfrm>
+          <a:prstGeom prst="rect">
+            <a:avLst/>
+          </a:prstGeom>
+        </p:spPr>
+      </p:pic>
+      <p:pic>
+        <p:nvPicPr>
+          <p:cNvPr id="6" name="Picture 5">
+            <a:extLst>
+              <a:ext uri="{FF2B5EF4-FFF2-40B4-BE49-F238E27FC236}">
+                <a16:creationId xmlns:a16="http://schemas.microsoft.com/office/drawing/2014/main" id="{1451E093-C62A-6F22-068D-C20B42191100}"/>
+              </a:ext>
+            </a:extLst>
+          </p:cNvPr>
+          <p:cNvPicPr>
+            <a:picLocks noChangeAspect="1"/>
+          </p:cNvPicPr>
+          <p:nvPr/>
+        </p:nvPicPr>
+        <p:blipFill>
+          <a:blip r:embed="rId4" cstate="email">
+            <a:extLst>
+              <a:ext uri="{28A0092B-C50C-407E-A947-70E740481C1C}">
+                <a14:useLocalDpi xmlns:a14="http://schemas.microsoft.com/office/drawing/2010/main"/>
+              </a:ext>
+            </a:extLst>
+          </a:blip>
+          <a:stretch>
+            <a:fillRect/>
+          </a:stretch>
+        </p:blipFill>
+        <p:spPr>
+          <a:xfrm>
+            <a:off x="3268717" y="3564674"/>
+            <a:ext cx="1902591" cy="3196739"/>
+          </a:xfrm>
+          <a:prstGeom prst="rect">
+            <a:avLst/>
+          </a:prstGeom>
+        </p:spPr>
+      </p:pic>
+      <p:pic>
+        <p:nvPicPr>
+          <p:cNvPr id="7" name="Picture 6">
+            <a:extLst>
+              <a:ext uri="{FF2B5EF4-FFF2-40B4-BE49-F238E27FC236}">
+                <a16:creationId xmlns:a16="http://schemas.microsoft.com/office/drawing/2014/main" id="{EF00A280-0C58-48C6-6374-6950E70484B4}"/>
+              </a:ext>
+            </a:extLst>
+          </p:cNvPr>
+          <p:cNvPicPr>
+            <a:picLocks noChangeAspect="1"/>
+          </p:cNvPicPr>
+          <p:nvPr/>
+        </p:nvPicPr>
+        <p:blipFill>
+          <a:blip r:embed="rId5" cstate="email">
+            <a:extLst>
+              <a:ext uri="{28A0092B-C50C-407E-A947-70E740481C1C}">
+                <a14:useLocalDpi xmlns:a14="http://schemas.microsoft.com/office/drawing/2010/main"/>
+              </a:ext>
+            </a:extLst>
+          </a:blip>
+          <a:stretch>
+            <a:fillRect/>
+          </a:stretch>
+        </p:blipFill>
+        <p:spPr>
+          <a:xfrm>
+            <a:off x="5318574" y="3564674"/>
+            <a:ext cx="1902591" cy="3196739"/>
+          </a:xfrm>
+          <a:prstGeom prst="rect">
+            <a:avLst/>
+          </a:prstGeom>
+        </p:spPr>
+      </p:pic>
+      <p:sp>
+        <p:nvSpPr>
+          <p:cNvPr id="8" name="TextBox 7">
+            <a:extLst>
+              <a:ext uri="{FF2B5EF4-FFF2-40B4-BE49-F238E27FC236}">
+                <a16:creationId xmlns:a16="http://schemas.microsoft.com/office/drawing/2014/main" id="{9A76ECB1-CBC6-46CA-370A-54A0F010E3EC}"/>
+              </a:ext>
+            </a:extLst>
+          </p:cNvPr>
+          <p:cNvSpPr txBox="1"/>
+          <p:nvPr/>
+        </p:nvSpPr>
+        <p:spPr>
+          <a:xfrm>
+            <a:off x="8145517" y="158840"/>
+            <a:ext cx="3920359" cy="1384995"/>
+          </a:xfrm>
+          <a:prstGeom prst="rect">
+            <a:avLst/>
+          </a:prstGeom>
+          <a:noFill/>
+        </p:spPr>
+        <p:txBody>
+          <a:bodyPr wrap="square" rtlCol="0">
+            <a:spAutoFit/>
+          </a:bodyPr>
+          <a:lstStyle/>
+          <a:p>
+            <a:r>
+              <a:rPr lang="en-US" sz="1400"/>
+              <a:t>August 2022 – bought on amazon:</a:t>
+            </a:r>
+          </a:p>
+          <a:p>
+            <a:endParaRPr lang="en-US" sz="1400"/>
+          </a:p>
+          <a:p>
+            <a:r>
+              <a:rPr lang="en-US" sz="1400"/>
+              <a:t>CH250 2-Pole 50-Amp Circuit Breaker, Type CH 3/4-Inch Plug-On Molded Case Circuit Breaker, Thermal Magnetic Protection, 10 KAIC, 120/240V, Fit for Cutler Hammer Load Centers (3 Years Warranty)</a:t>
+            </a:r>
+          </a:p>
+        </p:txBody>
+      </p:sp>
+      <p:pic>
+        <p:nvPicPr>
+          <p:cNvPr id="9" name="Picture 8">
+            <a:extLst>
+              <a:ext uri="{FF2B5EF4-FFF2-40B4-BE49-F238E27FC236}">
+                <a16:creationId xmlns:a16="http://schemas.microsoft.com/office/drawing/2014/main" id="{822E6762-F007-05A8-1499-16EDCBCDF195}"/>
+              </a:ext>
+            </a:extLst>
+          </p:cNvPr>
+          <p:cNvPicPr>
+            <a:picLocks noChangeAspect="1"/>
+          </p:cNvPicPr>
+          <p:nvPr/>
+        </p:nvPicPr>
+        <p:blipFill>
+          <a:blip r:embed="rId6" cstate="email">
+            <a:extLst>
+              <a:ext uri="{28A0092B-C50C-407E-A947-70E740481C1C}">
+                <a14:useLocalDpi xmlns:a14="http://schemas.microsoft.com/office/drawing/2010/main"/>
+              </a:ext>
+            </a:extLst>
+          </a:blip>
+          <a:stretch>
+            <a:fillRect/>
+          </a:stretch>
+        </p:blipFill>
+        <p:spPr>
+          <a:xfrm>
+            <a:off x="8679357" y="1543835"/>
+            <a:ext cx="2755900" cy="2997200"/>
+          </a:xfrm>
+          <a:prstGeom prst="rect">
+            <a:avLst/>
+          </a:prstGeom>
+        </p:spPr>
+      </p:pic>
+      <p:sp>
+        <p:nvSpPr>
+          <p:cNvPr id="10" name="TextBox 9">
+            <a:extLst>
+              <a:ext uri="{FF2B5EF4-FFF2-40B4-BE49-F238E27FC236}">
+                <a16:creationId xmlns:a16="http://schemas.microsoft.com/office/drawing/2014/main" id="{B1CA3A46-1658-9084-396B-2BC71E318A7F}"/>
+              </a:ext>
+            </a:extLst>
+          </p:cNvPr>
+          <p:cNvSpPr txBox="1"/>
+          <p:nvPr/>
+        </p:nvSpPr>
+        <p:spPr>
+          <a:xfrm>
+            <a:off x="252249" y="830320"/>
+            <a:ext cx="6379779" cy="461665"/>
+          </a:xfrm>
+          <a:prstGeom prst="rect">
+            <a:avLst/>
+          </a:prstGeom>
+          <a:noFill/>
+        </p:spPr>
+        <p:txBody>
+          <a:bodyPr wrap="square" rtlCol="0">
+            <a:spAutoFit/>
+          </a:bodyPr>
+          <a:lstStyle/>
+          <a:p>
+            <a:r>
+              <a:rPr lang="en-US" sz="1200" b="0" i="0" dirty="0">
+                <a:solidFill>
+                  <a:srgbClr val="333333"/>
+                </a:solidFill>
+                <a:effectLst/>
+                <a:latin typeface="helvetica-neue"/>
+              </a:rPr>
+              <a:t>Types of Circuit Breakers</a:t>
+            </a:r>
+            <a:endParaRPr lang="en-US" sz="1200" dirty="0">
+              <a:hlinkClick r:id="rId7"/>
+            </a:endParaRPr>
+          </a:p>
+          <a:p>
+            <a:r>
+              <a:rPr lang="en-US" sz="1200" dirty="0">
+                <a:hlinkClick r:id="rId7"/>
+              </a:rPr>
+              <a:t>https://www.homedepot.com/c/ab/types-of-circuit-breakers/9ba683603be9fa5395fab900f0d22b4</a:t>
+            </a:r>
+            <a:endParaRPr lang="en-US" sz="1200" dirty="0"/>
+          </a:p>
+        </p:txBody>
+      </p:sp>
+    </p:spTree>
+    <p:extLst>
+      <p:ext uri="{BB962C8B-B14F-4D97-AF65-F5344CB8AC3E}">
+        <p14:creationId xmlns:p14="http://schemas.microsoft.com/office/powerpoint/2010/main" val="2674537515"/>
+      </p:ext>
+    </p:extLst>
+  </p:cSld>
+  <p:clrMapOvr>
+    <a:masterClrMapping/>
+  </p:clrMapOvr>
+</p:sld>
+</file>
+
+<file path=ppt/slides/slide5.xml><?xml version="1.0" encoding="utf-8"?>
+<p:sld xmlns:a="http://schemas.openxmlformats.org/drawingml/2006/main" xmlns:r="http://schemas.openxmlformats.org/officeDocument/2006/relationships" xmlns:p="http://schemas.openxmlformats.org/presentationml/2006/main">
+  <p:cSld>
+    <p:spTree>
+      <p:nvGrpSpPr>
+        <p:cNvPr id="1" name=""/>
+        <p:cNvGrpSpPr/>
+        <p:nvPr/>
+      </p:nvGrpSpPr>
+      <p:grpSpPr>
+        <a:xfrm>
+          <a:off x="0" y="0"/>
+          <a:ext cx="0" cy="0"/>
+          <a:chOff x="0" y="0"/>
+          <a:chExt cx="0" cy="0"/>
+        </a:xfrm>
+      </p:grpSpPr>
+      <p:sp>
+        <p:nvSpPr>
+          <p:cNvPr id="2" name="TextBox 1">
+            <a:extLst>
+              <a:ext uri="{FF2B5EF4-FFF2-40B4-BE49-F238E27FC236}">
+                <a16:creationId xmlns:a16="http://schemas.microsoft.com/office/drawing/2014/main" id="{EE36FE47-BB4C-FCF2-33ED-2A30345CD962}"/>
+              </a:ext>
+            </a:extLst>
+          </p:cNvPr>
+          <p:cNvSpPr txBox="1"/>
+          <p:nvPr/>
+        </p:nvSpPr>
+        <p:spPr>
+          <a:xfrm>
             <a:off x="262758" y="283779"/>
             <a:ext cx="3573517" cy="369332"/>
           </a:xfrm>
@@ -6015,6 +7081,363 @@
     <p:extLst>
       <p:ext uri="{BB962C8B-B14F-4D97-AF65-F5344CB8AC3E}">
         <p14:creationId xmlns:p14="http://schemas.microsoft.com/office/powerpoint/2010/main" val="249167957"/>
+      </p:ext>
+    </p:extLst>
+  </p:cSld>
+  <p:clrMapOvr>
+    <a:masterClrMapping/>
+  </p:clrMapOvr>
+</p:sld>
+</file>
+
+<file path=ppt/slides/slide6.xml><?xml version="1.0" encoding="utf-8"?>
+<p:sld xmlns:a="http://schemas.openxmlformats.org/drawingml/2006/main" xmlns:r="http://schemas.openxmlformats.org/officeDocument/2006/relationships" xmlns:p="http://schemas.openxmlformats.org/presentationml/2006/main">
+  <p:cSld>
+    <p:spTree>
+      <p:nvGrpSpPr>
+        <p:cNvPr id="1" name=""/>
+        <p:cNvGrpSpPr/>
+        <p:nvPr/>
+      </p:nvGrpSpPr>
+      <p:grpSpPr>
+        <a:xfrm>
+          <a:off x="0" y="0"/>
+          <a:ext cx="0" cy="0"/>
+          <a:chOff x="0" y="0"/>
+          <a:chExt cx="0" cy="0"/>
+        </a:xfrm>
+      </p:grpSpPr>
+      <p:sp>
+        <p:nvSpPr>
+          <p:cNvPr id="2" name="TextBox 1">
+            <a:extLst>
+              <a:ext uri="{FF2B5EF4-FFF2-40B4-BE49-F238E27FC236}">
+                <a16:creationId xmlns:a16="http://schemas.microsoft.com/office/drawing/2014/main" id="{EE36FE47-BB4C-FCF2-33ED-2A30345CD962}"/>
+              </a:ext>
+            </a:extLst>
+          </p:cNvPr>
+          <p:cNvSpPr txBox="1"/>
+          <p:nvPr/>
+        </p:nvSpPr>
+        <p:spPr>
+          <a:xfrm>
+            <a:off x="0" y="0"/>
+            <a:ext cx="3573517" cy="461665"/>
+          </a:xfrm>
+          <a:prstGeom prst="rect">
+            <a:avLst/>
+          </a:prstGeom>
+          <a:noFill/>
+        </p:spPr>
+        <p:txBody>
+          <a:bodyPr wrap="square" rtlCol="0">
+            <a:spAutoFit/>
+          </a:bodyPr>
+          <a:lstStyle/>
+          <a:p>
+            <a:r>
+              <a:rPr lang="en-US" sz="2400" b="1" dirty="0"/>
+              <a:t>Splicing wires</a:t>
+            </a:r>
+          </a:p>
+        </p:txBody>
+      </p:sp>
+      <p:sp>
+        <p:nvSpPr>
+          <p:cNvPr id="6" name="TextBox 5">
+            <a:extLst>
+              <a:ext uri="{FF2B5EF4-FFF2-40B4-BE49-F238E27FC236}">
+                <a16:creationId xmlns:a16="http://schemas.microsoft.com/office/drawing/2014/main" id="{FDE2509D-881B-316D-6E34-85C049F00325}"/>
+              </a:ext>
+            </a:extLst>
+          </p:cNvPr>
+          <p:cNvSpPr txBox="1"/>
+          <p:nvPr/>
+        </p:nvSpPr>
+        <p:spPr>
+          <a:xfrm>
+            <a:off x="204781" y="710414"/>
+            <a:ext cx="4184339" cy="2462213"/>
+          </a:xfrm>
+          <a:prstGeom prst="rect">
+            <a:avLst/>
+          </a:prstGeom>
+          <a:solidFill>
+            <a:schemeClr val="accent4">
+              <a:lumMod val="20000"/>
+              <a:lumOff val="80000"/>
+            </a:schemeClr>
+          </a:solidFill>
+          <a:ln>
+            <a:solidFill>
+              <a:srgbClr val="FF0000"/>
+            </a:solidFill>
+          </a:ln>
+        </p:spPr>
+        <p:txBody>
+          <a:bodyPr wrap="square" rtlCol="0">
+            <a:spAutoFit/>
+          </a:bodyPr>
+          <a:lstStyle/>
+          <a:p>
+            <a:pPr algn="l" fontAlgn="base"/>
+            <a:r>
+              <a:rPr lang="en-US" sz="1400" b="0" i="0" dirty="0">
+                <a:solidFill>
+                  <a:srgbClr val="232629"/>
+                </a:solidFill>
+                <a:effectLst/>
+                <a:latin typeface="Calibri" panose="020F0502020204030204" pitchFamily="34" charset="0"/>
+                <a:cs typeface="Calibri" panose="020F0502020204030204" pitchFamily="34" charset="0"/>
+                <a:hlinkClick r:id="rId2"/>
+              </a:rPr>
+              <a:t>https://</a:t>
+            </a:r>
+            <a:r>
+              <a:rPr lang="en-US" sz="1400" b="0" i="0" dirty="0" err="1">
+                <a:solidFill>
+                  <a:srgbClr val="232629"/>
+                </a:solidFill>
+                <a:effectLst/>
+                <a:latin typeface="Calibri" panose="020F0502020204030204" pitchFamily="34" charset="0"/>
+                <a:cs typeface="Calibri" panose="020F0502020204030204" pitchFamily="34" charset="0"/>
+                <a:hlinkClick r:id="rId2"/>
+              </a:rPr>
+              <a:t>en.wikipedia.org</a:t>
+            </a:r>
+            <a:r>
+              <a:rPr lang="en-US" sz="1400" b="0" i="0" dirty="0">
+                <a:solidFill>
+                  <a:srgbClr val="232629"/>
+                </a:solidFill>
+                <a:effectLst/>
+                <a:latin typeface="Calibri" panose="020F0502020204030204" pitchFamily="34" charset="0"/>
+                <a:cs typeface="Calibri" panose="020F0502020204030204" pitchFamily="34" charset="0"/>
+                <a:hlinkClick r:id="rId2"/>
+              </a:rPr>
+              <a:t>/wiki/</a:t>
+            </a:r>
+            <a:r>
+              <a:rPr lang="en-US" sz="1400" b="0" i="0" dirty="0" err="1">
+                <a:solidFill>
+                  <a:srgbClr val="232629"/>
+                </a:solidFill>
+                <a:effectLst/>
+                <a:latin typeface="Calibri" panose="020F0502020204030204" pitchFamily="34" charset="0"/>
+                <a:cs typeface="Calibri" panose="020F0502020204030204" pitchFamily="34" charset="0"/>
+                <a:hlinkClick r:id="rId2"/>
+              </a:rPr>
+              <a:t>Western_Union_splice</a:t>
+            </a:r>
+            <a:endParaRPr lang="en-US" sz="1400" b="0" i="0" dirty="0">
+              <a:solidFill>
+                <a:srgbClr val="232629"/>
+              </a:solidFill>
+              <a:effectLst/>
+              <a:latin typeface="Calibri" panose="020F0502020204030204" pitchFamily="34" charset="0"/>
+              <a:cs typeface="Calibri" panose="020F0502020204030204" pitchFamily="34" charset="0"/>
+            </a:endParaRPr>
+          </a:p>
+          <a:p>
+            <a:pPr algn="l" fontAlgn="base"/>
+            <a:r>
+              <a:rPr lang="en-US" sz="1400" b="0" i="0" dirty="0">
+                <a:solidFill>
+                  <a:srgbClr val="232629"/>
+                </a:solidFill>
+                <a:effectLst/>
+                <a:latin typeface="Calibri" panose="020F0502020204030204" pitchFamily="34" charset="0"/>
+                <a:cs typeface="Calibri" panose="020F0502020204030204" pitchFamily="34" charset="0"/>
+              </a:rPr>
+              <a:t>The </a:t>
+            </a:r>
+            <a:r>
+              <a:rPr lang="en-US" sz="1400" b="1" i="0" dirty="0">
+                <a:solidFill>
+                  <a:srgbClr val="FF0000"/>
+                </a:solidFill>
+                <a:effectLst/>
+                <a:latin typeface="Calibri" panose="020F0502020204030204" pitchFamily="34" charset="0"/>
+                <a:cs typeface="Calibri" panose="020F0502020204030204" pitchFamily="34" charset="0"/>
+              </a:rPr>
+              <a:t>Western Union splice or Lineman splice </a:t>
+            </a:r>
+          </a:p>
+          <a:p>
+            <a:pPr algn="l" fontAlgn="base"/>
+            <a:r>
+              <a:rPr lang="en-US" sz="1400" b="0" i="0" dirty="0">
+                <a:solidFill>
+                  <a:srgbClr val="232629"/>
+                </a:solidFill>
+                <a:effectLst/>
+                <a:latin typeface="Calibri" panose="020F0502020204030204" pitchFamily="34" charset="0"/>
+                <a:cs typeface="Calibri" panose="020F0502020204030204" pitchFamily="34" charset="0"/>
+              </a:rPr>
+              <a:t>is a method of joining electrical cable, </a:t>
+            </a:r>
+          </a:p>
+          <a:p>
+            <a:pPr algn="l" fontAlgn="base"/>
+            <a:r>
+              <a:rPr lang="en-US" sz="1400" b="0" i="0" dirty="0">
+                <a:solidFill>
+                  <a:srgbClr val="232629"/>
+                </a:solidFill>
+                <a:effectLst/>
+                <a:latin typeface="Calibri" panose="020F0502020204030204" pitchFamily="34" charset="0"/>
+                <a:cs typeface="Calibri" panose="020F0502020204030204" pitchFamily="34" charset="0"/>
+              </a:rPr>
+              <a:t>developed in the nineteenth century during the </a:t>
+            </a:r>
+          </a:p>
+          <a:p>
+            <a:pPr algn="l" fontAlgn="base"/>
+            <a:r>
+              <a:rPr lang="en-US" sz="1400" b="0" i="0" dirty="0">
+                <a:solidFill>
+                  <a:srgbClr val="232629"/>
+                </a:solidFill>
+                <a:effectLst/>
+                <a:latin typeface="Calibri" panose="020F0502020204030204" pitchFamily="34" charset="0"/>
+                <a:cs typeface="Calibri" panose="020F0502020204030204" pitchFamily="34" charset="0"/>
+              </a:rPr>
+              <a:t>introduction of the telegraph </a:t>
+            </a:r>
+          </a:p>
+          <a:p>
+            <a:pPr algn="l" fontAlgn="base"/>
+            <a:r>
+              <a:rPr lang="en-US" sz="1400" b="0" i="0" dirty="0">
+                <a:solidFill>
+                  <a:srgbClr val="232629"/>
+                </a:solidFill>
+                <a:effectLst/>
+                <a:latin typeface="Calibri" panose="020F0502020204030204" pitchFamily="34" charset="0"/>
+                <a:cs typeface="Calibri" panose="020F0502020204030204" pitchFamily="34" charset="0"/>
+              </a:rPr>
+              <a:t>and named for the Western Union telegraph company. </a:t>
+            </a:r>
+          </a:p>
+          <a:p>
+            <a:pPr algn="l" fontAlgn="base"/>
+            <a:endParaRPr lang="en-US" sz="1400" dirty="0">
+              <a:solidFill>
+                <a:srgbClr val="232629"/>
+              </a:solidFill>
+              <a:latin typeface="Calibri" panose="020F0502020204030204" pitchFamily="34" charset="0"/>
+              <a:cs typeface="Calibri" panose="020F0502020204030204" pitchFamily="34" charset="0"/>
+            </a:endParaRPr>
+          </a:p>
+          <a:p>
+            <a:pPr algn="l" fontAlgn="base"/>
+            <a:r>
+              <a:rPr lang="en-US" sz="1400" b="0" i="0" dirty="0">
+                <a:solidFill>
+                  <a:srgbClr val="232629"/>
+                </a:solidFill>
+                <a:effectLst/>
+                <a:latin typeface="Calibri" panose="020F0502020204030204" pitchFamily="34" charset="0"/>
+                <a:cs typeface="Calibri" panose="020F0502020204030204" pitchFamily="34" charset="0"/>
+              </a:rPr>
+              <a:t>This method can be used where the cable </a:t>
+            </a:r>
+          </a:p>
+          <a:p>
+            <a:pPr algn="l" fontAlgn="base"/>
+            <a:r>
+              <a:rPr lang="en-US" sz="1400" b="0" i="0" dirty="0">
+                <a:solidFill>
+                  <a:srgbClr val="232629"/>
+                </a:solidFill>
+                <a:effectLst/>
+                <a:latin typeface="Calibri" panose="020F0502020204030204" pitchFamily="34" charset="0"/>
+                <a:cs typeface="Calibri" panose="020F0502020204030204" pitchFamily="34" charset="0"/>
+              </a:rPr>
+              <a:t>may be subject to loading stress. </a:t>
+            </a:r>
+          </a:p>
+          <a:p>
+            <a:pPr algn="l" fontAlgn="base"/>
+            <a:r>
+              <a:rPr lang="en-US" sz="1400" b="0" i="0" dirty="0">
+                <a:solidFill>
+                  <a:srgbClr val="232629"/>
+                </a:solidFill>
+                <a:effectLst/>
+                <a:latin typeface="Calibri" panose="020F0502020204030204" pitchFamily="34" charset="0"/>
+                <a:cs typeface="Calibri" panose="020F0502020204030204" pitchFamily="34" charset="0"/>
+              </a:rPr>
+              <a:t>The wrapping pattern design causes the join</a:t>
+            </a:r>
+          </a:p>
+          <a:p>
+            <a:pPr algn="l" fontAlgn="base"/>
+            <a:r>
+              <a:rPr lang="en-US" sz="1400" b="0" i="0" dirty="0">
+                <a:solidFill>
+                  <a:srgbClr val="232629"/>
+                </a:solidFill>
+                <a:effectLst/>
+                <a:latin typeface="Calibri" panose="020F0502020204030204" pitchFamily="34" charset="0"/>
+                <a:cs typeface="Calibri" panose="020F0502020204030204" pitchFamily="34" charset="0"/>
+              </a:rPr>
+              <a:t> to tighten as the conductors pull against each other.</a:t>
+            </a:r>
+          </a:p>
+        </p:txBody>
+      </p:sp>
+      <p:pic>
+        <p:nvPicPr>
+          <p:cNvPr id="1026" name="Picture 2" descr="undefined">
+            <a:extLst>
+              <a:ext uri="{FF2B5EF4-FFF2-40B4-BE49-F238E27FC236}">
+                <a16:creationId xmlns:a16="http://schemas.microsoft.com/office/drawing/2014/main" id="{F95077C5-F523-DFB3-1C1A-BECA91851405}"/>
+              </a:ext>
+            </a:extLst>
+          </p:cNvPr>
+          <p:cNvPicPr>
+            <a:picLocks noChangeAspect="1" noChangeArrowheads="1"/>
+          </p:cNvPicPr>
+          <p:nvPr/>
+        </p:nvPicPr>
+        <p:blipFill>
+          <a:blip r:embed="rId3" cstate="email">
+            <a:extLst>
+              <a:ext uri="{28A0092B-C50C-407E-A947-70E740481C1C}">
+                <a14:useLocalDpi xmlns:a14="http://schemas.microsoft.com/office/drawing/2010/main"/>
+              </a:ext>
+            </a:extLst>
+          </a:blip>
+          <a:srcRect/>
+          <a:stretch>
+            <a:fillRect/>
+          </a:stretch>
+        </p:blipFill>
+        <p:spPr bwMode="auto">
+          <a:xfrm>
+            <a:off x="4575169" y="230832"/>
+            <a:ext cx="3523359" cy="6266329"/>
+          </a:xfrm>
+          <a:prstGeom prst="rect">
+            <a:avLst/>
+          </a:prstGeom>
+          <a:noFill/>
+          <a:extLst>
+            <a:ext uri="{909E8E84-426E-40DD-AFC4-6F175D3DCCD1}">
+              <a14:hiddenFill xmlns:a14="http://schemas.microsoft.com/office/drawing/2010/main">
+                <a:solidFill>
+                  <a:srgbClr val="FFFFFF"/>
+                </a:solidFill>
+              </a14:hiddenFill>
+            </a:ext>
+          </a:extLst>
+        </p:spPr>
+      </p:pic>
+    </p:spTree>
+    <p:extLst>
+      <p:ext uri="{BB962C8B-B14F-4D97-AF65-F5344CB8AC3E}">
+        <p14:creationId xmlns:p14="http://schemas.microsoft.com/office/powerpoint/2010/main" val="3046393023"/>
       </p:ext>
     </p:extLst>
   </p:cSld>
